--- a/1 Year 12 Weekly/Week 17 (18 Jan) 1.4.1 Character sets + 2.2.1/1 Lesson 2.2.1.pptx
+++ b/1 Year 12 Weekly/Week 17 (18 Jan) 1.4.1 Character sets + 2.2.1/1 Lesson 2.2.1.pptx
@@ -3183,7 +3183,7 @@
                 </a:solidFill>
                 <a:latin typeface="Calibri"/>
               </a:rPr>
-              <a:t>Lesson deck — editable skeleton: adapt freely.</a:t>
+              <a:t>Editable lesson deck — adapt freely.</a:t>
             </a:r>
           </a:p>
         </p:txBody>
@@ -3272,7 +3272,7 @@
           <a:p>
             <a:pPr/>
             <a:r>
-              <a:rPr sz="2200" b="0">
+              <a:rPr sz="2000" b="0">
                 <a:solidFill>
                   <a:srgbClr val="222222"/>
                 </a:solidFill>
@@ -3284,7 +3284,7 @@
           <a:p>
             <a:pPr/>
             <a:r>
-              <a:rPr sz="2200" b="0">
+              <a:rPr sz="2000" b="0">
                 <a:solidFill>
                   <a:srgbClr val="222222"/>
                 </a:solidFill>
@@ -3296,7 +3296,7 @@
           <a:p>
             <a:pPr/>
             <a:r>
-              <a:rPr sz="2200" b="0">
+              <a:rPr sz="2000" b="0">
                 <a:solidFill>
                   <a:srgbClr val="222222"/>
                 </a:solidFill>
@@ -3403,7 +3403,7 @@
           <a:p>
             <a:pPr lvl="1"/>
             <a:r>
-              <a:rPr sz="2000" b="0">
+              <a:rPr sz="1900" b="0">
                 <a:solidFill>
                   <a:srgbClr val="222222"/>
                 </a:solidFill>
@@ -3415,7 +3415,7 @@
           <a:p>
             <a:pPr lvl="1"/>
             <a:r>
-              <a:rPr sz="2000" b="0">
+              <a:rPr sz="1900" b="0">
                 <a:solidFill>
                   <a:srgbClr val="222222"/>
                 </a:solidFill>
@@ -3427,7 +3427,7 @@
           <a:p>
             <a:pPr lvl="1"/>
             <a:r>
-              <a:rPr sz="2000" b="0">
+              <a:rPr sz="1900" b="0">
                 <a:solidFill>
                   <a:srgbClr val="222222"/>
                 </a:solidFill>
@@ -3439,7 +3439,7 @@
           <a:p>
             <a:pPr lvl="1"/>
             <a:r>
-              <a:rPr sz="2000" b="0">
+              <a:rPr sz="1900" b="0">
                 <a:solidFill>
                   <a:srgbClr val="222222"/>
                 </a:solidFill>
@@ -3451,7 +3451,7 @@
           <a:p>
             <a:pPr lvl="1"/>
             <a:r>
-              <a:rPr sz="2000" b="0">
+              <a:rPr sz="1900" b="0">
                 <a:solidFill>
                   <a:srgbClr val="222222"/>
                 </a:solidFill>
@@ -3463,7 +3463,7 @@
           <a:p>
             <a:pPr lvl="1"/>
             <a:r>
-              <a:rPr sz="2000" b="0">
+              <a:rPr sz="1900" b="0">
                 <a:solidFill>
                   <a:srgbClr val="222222"/>
                 </a:solidFill>
@@ -4667,7 +4667,7 @@
           <a:p>
             <a:pPr/>
             <a:r>
-              <a:rPr sz="2200" b="0">
+              <a:rPr sz="2000" b="0">
                 <a:solidFill>
                   <a:srgbClr val="222222"/>
                 </a:solidFill>
@@ -4679,7 +4679,7 @@
           <a:p>
             <a:pPr/>
             <a:r>
-              <a:rPr sz="2200" b="0">
+              <a:rPr sz="2000" b="0">
                 <a:solidFill>
                   <a:srgbClr val="222222"/>
                 </a:solidFill>
@@ -4691,7 +4691,7 @@
           <a:p>
             <a:pPr/>
             <a:r>
-              <a:rPr sz="2200" b="0">
+              <a:rPr sz="2000" b="0">
                 <a:solidFill>
                   <a:srgbClr val="222222"/>
                 </a:solidFill>
@@ -4786,7 +4786,7 @@
           <a:p>
             <a:pPr/>
             <a:r>
-              <a:rPr sz="2200" b="0">
+              <a:rPr sz="2000" b="0">
                 <a:solidFill>
                   <a:srgbClr val="222222"/>
                 </a:solidFill>
@@ -4798,7 +4798,7 @@
           <a:p>
             <a:pPr/>
             <a:r>
-              <a:rPr sz="2200" b="0">
+              <a:rPr sz="2000" b="0">
                 <a:solidFill>
                   <a:srgbClr val="222222"/>
                 </a:solidFill>
@@ -4810,7 +4810,7 @@
           <a:p>
             <a:pPr/>
             <a:r>
-              <a:rPr sz="2200" b="0">
+              <a:rPr sz="2000" b="0">
                 <a:solidFill>
                   <a:srgbClr val="222222"/>
                 </a:solidFill>
@@ -4905,7 +4905,7 @@
           <a:p>
             <a:pPr/>
             <a:r>
-              <a:rPr sz="2200" b="0">
+              <a:rPr sz="2000" b="0">
                 <a:solidFill>
                   <a:srgbClr val="222222"/>
                 </a:solidFill>
@@ -4917,7 +4917,7 @@
           <a:p>
             <a:pPr/>
             <a:r>
-              <a:rPr sz="2200" b="0">
+              <a:rPr sz="2000" b="0">
                 <a:solidFill>
                   <a:srgbClr val="222222"/>
                 </a:solidFill>
@@ -4929,7 +4929,7 @@
           <a:p>
             <a:pPr/>
             <a:r>
-              <a:rPr sz="2200" b="0">
+              <a:rPr sz="2000" b="0">
                 <a:solidFill>
                   <a:srgbClr val="222222"/>
                 </a:solidFill>
@@ -5024,7 +5024,7 @@
           <a:p>
             <a:pPr/>
             <a:r>
-              <a:rPr sz="2200" b="0">
+              <a:rPr sz="2000" b="0">
                 <a:solidFill>
                   <a:srgbClr val="222222"/>
                 </a:solidFill>
@@ -5036,7 +5036,7 @@
           <a:p>
             <a:pPr/>
             <a:r>
-              <a:rPr sz="2200" b="0">
+              <a:rPr sz="2000" b="0">
                 <a:solidFill>
                   <a:srgbClr val="222222"/>
                 </a:solidFill>
@@ -5048,7 +5048,7 @@
           <a:p>
             <a:pPr/>
             <a:r>
-              <a:rPr sz="2200" b="0">
+              <a:rPr sz="2000" b="0">
                 <a:solidFill>
                   <a:srgbClr val="222222"/>
                 </a:solidFill>

--- a/1 Year 12 Weekly/Week 17 (18 Jan) 1.4.1 Character sets + 2.2.1/1 Lesson 2.2.1.pptx
+++ b/1 Year 12 Weekly/Week 17 (18 Jan) 1.4.1 Character sets + 2.2.1/1 Lesson 2.2.1.pptx
@@ -19,6 +19,22 @@
     <p:sldId id="267" r:id="rId18"/>
     <p:sldId id="268" r:id="rId19"/>
     <p:sldId id="269" r:id="rId20"/>
+    <p:sldId id="270" r:id="rId21"/>
+    <p:sldId id="271" r:id="rId22"/>
+    <p:sldId id="272" r:id="rId23"/>
+    <p:sldId id="273" r:id="rId24"/>
+    <p:sldId id="274" r:id="rId25"/>
+    <p:sldId id="275" r:id="rId26"/>
+    <p:sldId id="276" r:id="rId27"/>
+    <p:sldId id="277" r:id="rId28"/>
+    <p:sldId id="278" r:id="rId29"/>
+    <p:sldId id="279" r:id="rId30"/>
+    <p:sldId id="280" r:id="rId31"/>
+    <p:sldId id="281" r:id="rId32"/>
+    <p:sldId id="282" r:id="rId33"/>
+    <p:sldId id="283" r:id="rId34"/>
+    <p:sldId id="284" r:id="rId35"/>
+    <p:sldId id="285" r:id="rId36"/>
   </p:sldIdLst>
   <p:sldSz cx="12191695" cy="6858000" type="screen4x3"/>
   <p:notesSz cx="6858000" cy="9144000"/>
@@ -3183,7 +3199,7 @@
                 </a:solidFill>
                 <a:latin typeface="Calibri"/>
               </a:rPr>
-              <a:t>Editable lesson deck — adapt freely.</a:t>
+              <a:t>Week 17 (18 Jan)</a:t>
             </a:r>
           </a:p>
         </p:txBody>
@@ -3243,7 +3259,7 @@
                 </a:solidFill>
                 <a:latin typeface="Calibri"/>
               </a:rPr>
-              <a:t>Object-oriented programming</a:t>
+              <a:t>Recursion and the call stack</a:t>
             </a:r>
           </a:p>
         </p:txBody>
@@ -3278,7 +3294,7 @@
                 </a:solidFill>
                 <a:latin typeface="Calibri"/>
               </a:rPr>
-              <a:t>A class is a template defining attributes and methods; an object is a specific instance of a class created at run time</a:t>
+              <a:t>Each call pushes a stack frame: its parameters, local variables and return address.</a:t>
             </a:r>
           </a:p>
           <a:p>
@@ -3290,7 +3306,7 @@
                 </a:solidFill>
                 <a:latin typeface="Calibri"/>
               </a:rPr>
-              <a:t>Encapsulation keeps attributes private and exposes public getters/setters (data hiding protects integrity); a constructor (OCR: new) initialises attributes</a:t>
+              <a:t>Frames pop in reverse (LIFO) order as each call returns its value to its caller.</a:t>
             </a:r>
           </a:p>
           <a:p>
@@ -3302,7 +3318,19 @@
                 </a:solidFill>
                 <a:latin typeface="Calibri"/>
               </a:rPr>
-              <a:t>Inheritance lets a subclass acquire a superclass's attributes and methods (models is-a); polymorphism makes the same method call behave differently per object type, usually via overriding</a:t>
+              <a:t>The deepest frame is always the base case; results are combined on the way back up.</a:t>
+            </a:r>
+          </a:p>
+          <a:p>
+            <a:pPr/>
+            <a:r>
+              <a:rPr sz="2000" b="0">
+                <a:solidFill>
+                  <a:srgbClr val="222222"/>
+                </a:solidFill>
+                <a:latin typeface="Calibri"/>
+              </a:rPr>
+              <a:t>Too many frames exhaust stack memory: that is the stack overflow error.</a:t>
             </a:r>
           </a:p>
         </p:txBody>
@@ -3362,7 +3390,7 @@
                 </a:solidFill>
                 <a:latin typeface="Calibri"/>
               </a:rPr>
-              <a:t>Worked example</a:t>
+              <a:t>Recursion versus iteration</a:t>
             </a:r>
           </a:p>
         </p:txBody>
@@ -3391,85 +3419,49 @@
           <a:p>
             <a:pPr/>
             <a:r>
-              <a:rPr sz="2200" b="1">
-                <a:solidFill>
-                  <a:srgbClr val="2B6CB0"/>
-                </a:solidFill>
-                <a:latin typeface="Calibri"/>
-              </a:rPr>
-              <a:t>Tracing factorial(4) on the call stack</a:t>
-            </a:r>
-          </a:p>
-          <a:p>
-            <a:pPr lvl="1"/>
-            <a:r>
-              <a:rPr sz="1900" b="0">
-                <a:solidFill>
-                  <a:srgbClr val="222222"/>
-                </a:solidFill>
-                <a:latin typeface="Calibri"/>
-              </a:rPr>
-              <a:t>1. function factorial(n): if n &lt;= 1 then return 1 else return n * factorial(n - 1)</a:t>
-            </a:r>
-          </a:p>
-          <a:p>
-            <a:pPr lvl="1"/>
-            <a:r>
-              <a:rPr sz="1900" b="0">
-                <a:solidFill>
-                  <a:srgbClr val="222222"/>
-                </a:solidFill>
-                <a:latin typeface="Calibri"/>
-              </a:rPr>
-              <a:t>2. Call factorial(4): not base case, so push a frame and call factorial(3)</a:t>
-            </a:r>
-          </a:p>
-          <a:p>
-            <a:pPr lvl="1"/>
-            <a:r>
-              <a:rPr sz="1900" b="0">
-                <a:solidFill>
-                  <a:srgbClr val="222222"/>
-                </a:solidFill>
-                <a:latin typeface="Calibri"/>
-              </a:rPr>
-              <a:t>3. Call factorial(3): push a frame and call factorial(2); call factorial(2): push a frame and call factorial(1)</a:t>
-            </a:r>
-          </a:p>
-          <a:p>
-            <a:pPr lvl="1"/>
-            <a:r>
-              <a:rPr sz="1900" b="0">
-                <a:solidFill>
-                  <a:srgbClr val="222222"/>
-                </a:solidFill>
-                <a:latin typeface="Calibri"/>
-              </a:rPr>
-              <a:t>4. factorial(1): n &lt;= 1 is true, so the base case returns 1 with no further call</a:t>
-            </a:r>
-          </a:p>
-          <a:p>
-            <a:pPr lvl="1"/>
-            <a:r>
-              <a:rPr sz="1900" b="0">
-                <a:solidFill>
-                  <a:srgbClr val="222222"/>
-                </a:solidFill>
-                <a:latin typeface="Calibri"/>
-              </a:rPr>
-              <a:t>5. Frames now pop in LIFO order: factorial(2) returns 2*1 = 2, factorial(3) returns 3*2 = 6, factorial(4) returns 4*6 = 24</a:t>
-            </a:r>
-          </a:p>
-          <a:p>
-            <a:pPr lvl="1"/>
-            <a:r>
-              <a:rPr sz="1900" b="0">
-                <a:solidFill>
-                  <a:srgbClr val="222222"/>
-                </a:solidFill>
-                <a:latin typeface="Calibri"/>
-              </a:rPr>
-              <a:t>6. The stack is now empty and the final result returned to the caller is 24</a:t>
+              <a:rPr sz="2000" b="0">
+                <a:solidFill>
+                  <a:srgbClr val="222222"/>
+                </a:solidFill>
+                <a:latin typeface="Calibri"/>
+              </a:rPr>
+              <a:t>Any recursion can be rewritten iteratively, and vice versa.</a:t>
+            </a:r>
+          </a:p>
+          <a:p>
+            <a:pPr/>
+            <a:r>
+              <a:rPr sz="2000" b="0">
+                <a:solidFill>
+                  <a:srgbClr val="222222"/>
+                </a:solidFill>
+                <a:latin typeface="Calibri"/>
+              </a:rPr>
+              <a:t>Recursion: shorter, more natural code for self-similar problems - trees, quicksort, backtracking.</a:t>
+            </a:r>
+          </a:p>
+          <a:p>
+            <a:pPr/>
+            <a:r>
+              <a:rPr sz="2000" b="0">
+                <a:solidFill>
+                  <a:srgbClr val="222222"/>
+                </a:solidFill>
+                <a:latin typeface="Calibri"/>
+              </a:rPr>
+              <a:t>Iteration: one set of variables, no frame per repetition, so less memory and no overflow risk.</a:t>
+            </a:r>
+          </a:p>
+          <a:p>
+            <a:pPr/>
+            <a:r>
+              <a:rPr sz="2000" b="0">
+                <a:solidFill>
+                  <a:srgbClr val="222222"/>
+                </a:solidFill>
+                <a:latin typeface="Calibri"/>
+              </a:rPr>
+              <a:t>Recursion also pays a time cost: every call pushes and pops a frame.</a:t>
             </a:r>
           </a:p>
         </p:txBody>
@@ -3529,7 +3521,7 @@
                 </a:solidFill>
                 <a:latin typeface="Calibri"/>
               </a:rPr>
-              <a:t>Your turn</a:t>
+              <a:t>Scope: global versus local</a:t>
             </a:r>
           </a:p>
         </p:txBody>
@@ -3558,48 +3550,61 @@
           <a:p>
             <a:pPr/>
             <a:r>
-              <a:rPr sz="2400" b="1">
-                <a:solidFill>
-                  <a:srgbClr val="2B6CB0"/>
-                </a:solidFill>
-                <a:latin typeface="Calibri"/>
-              </a:rPr>
-              <a:t>Task</a:t>
-            </a:r>
-          </a:p>
-          <a:p>
-            <a:pPr lvl="1"/>
-            <a:r>
-              <a:rPr sz="2200" b="0">
-                <a:solidFill>
-                  <a:srgbClr val="222222"/>
-                </a:solidFill>
-                <a:latin typeface="Calibri"/>
-              </a:rPr>
-              <a:t>Trace the call factorial(4) using the routine above: draw the call stack showing each frame as it is pushed, mark where the base case is reached, then show each value returned as the frames pop, ending with the final answer 24.</a:t>
-            </a:r>
-          </a:p>
-          <a:p>
-            <a:r>
-              <a:rPr sz="2400" b="1">
+              <a:rPr sz="2000" b="0">
+                <a:solidFill>
+                  <a:srgbClr val="222222"/>
+                </a:solidFill>
+                <a:latin typeface="Calibri"/>
+              </a:rPr>
+              <a:t>A local variable is declared inside a subroutine: visible only there, destroyed on exit.</a:t>
+            </a:r>
+          </a:p>
+          <a:p>
+            <a:pPr/>
+            <a:r>
+              <a:rPr sz="2000" b="0">
+                <a:solidFill>
+                  <a:srgbClr val="222222"/>
+                </a:solidFill>
+                <a:latin typeface="Calibri"/>
+              </a:rPr>
+              <a:t>A global is declared in the main program: visible everywhere, alive all run long.</a:t>
+            </a:r>
+          </a:p>
+          <a:p>
+            <a:pPr/>
+            <a:r>
+              <a:rPr sz="2000" b="0">
+                <a:solidFill>
+                  <a:srgbClr val="222222"/>
+                </a:solidFill>
+                <a:latin typeface="Calibri"/>
+              </a:rPr>
+              <a:t>A local with the same name shadows the global - assigning to it leaves the global untouched.</a:t>
+            </a:r>
+          </a:p>
+          <a:p>
+            <a:pPr/>
+            <a:r>
+              <a:rPr sz="2000" b="0">
+                <a:solidFill>
+                  <a:srgbClr val="222222"/>
+                </a:solidFill>
+                <a:latin typeface="Calibri"/>
+              </a:rPr>
+              <a:t>Prefer locals: fewer side effects, memory freed on exit, subroutines stay self-contained and testable.</a:t>
+            </a:r>
+          </a:p>
+          <a:p>
+            <a:pPr/>
+            <a:r>
+              <a:rPr sz="1800" b="1">
                 <a:solidFill>
                   <a:srgbClr val="B76E00"/>
                 </a:solidFill>
                 <a:latin typeface="Calibri"/>
               </a:rPr>
-              <a:t>Challenge / stretch</a:t>
-            </a:r>
-          </a:p>
-          <a:p>
-            <a:pPr lvl="1"/>
-            <a:r>
-              <a:rPr sz="2200" b="0">
-                <a:solidFill>
-                  <a:srgbClr val="222222"/>
-                </a:solidFill>
-                <a:latin typeface="Calibri"/>
-              </a:rPr>
-              <a:t>Given procedure addOne(byRef n) and procedure addOne(byVal n) each doing n = n + 1, and a variable x = 3, state the value of x after each call and explain the difference in terms of consequence (not just that a copy is made). Then rewrite factorial as an iterative for...next loop and state one advantage of each version.</a:t>
+              <a:t>In OCR ERL a subroutine writes to a true global only after declaring global inside it.</a:t>
             </a:r>
           </a:p>
         </p:txBody>
@@ -3659,7 +3664,7 @@
                 </a:solidFill>
                 <a:latin typeface="Calibri"/>
               </a:rPr>
-              <a:t>Exit ticket</a:t>
+              <a:t>Modularity, functions and procedures</a:t>
             </a:r>
           </a:p>
         </p:txBody>
@@ -3686,36 +3691,123 @@
           </a:bodyPr>
           <a:lstStyle/>
           <a:p>
-            <a:r>
-              <a:rPr sz="2200" b="1">
-                <a:solidFill>
-                  <a:srgbClr val="222222"/>
-                </a:solidFill>
-                <a:latin typeface="Calibri"/>
-              </a:rPr>
-              <a:t>1. Why does a recursive routine with no reachable base case crash, and what is the error called?</a:t>
-            </a:r>
-          </a:p>
-          <a:p>
-            <a:r>
-              <a:rPr sz="2200" b="1">
-                <a:solidFill>
-                  <a:srgbClr val="222222"/>
-                </a:solidFill>
-                <a:latin typeface="Calibri"/>
-              </a:rPr>
-              <a:t>2. A global total = 10; inside a procedure an assignment total = 5 then print(total) runs, then print(total) runs in the main program. What two values print and why?</a:t>
-            </a:r>
-          </a:p>
-          <a:p>
-            <a:r>
-              <a:rPr sz="2200" b="1">
-                <a:solidFill>
-                  <a:srgbClr val="222222"/>
-                </a:solidFill>
-                <a:latin typeface="Calibri"/>
-              </a:rPr>
-              <a:t>3. In OCR pseudocode, why must getBalance() be written as a function rather than a procedure?</a:t>
+            <a:pPr/>
+            <a:r>
+              <a:rPr sz="2000" b="0">
+                <a:solidFill>
+                  <a:srgbClr val="222222"/>
+                </a:solidFill>
+                <a:latin typeface="Calibri"/>
+              </a:rPr>
+              <a:t>Modularity splits a program into subroutines, each doing one job.</a:t>
+            </a:r>
+          </a:p>
+          <a:p>
+            <a:pPr/>
+            <a:r>
+              <a:rPr sz="2000" b="0">
+                <a:solidFill>
+                  <a:srgbClr val="222222"/>
+                </a:solidFill>
+                <a:latin typeface="Calibri"/>
+              </a:rPr>
+              <a:t>Benefits: easier to write, test and debug; reusable; a team can build modules in parallel.</a:t>
+            </a:r>
+          </a:p>
+          <a:p>
+            <a:pPr/>
+            <a:r>
+              <a:rPr sz="2000" b="0">
+                <a:solidFill>
+                  <a:srgbClr val="222222"/>
+                </a:solidFill>
+                <a:latin typeface="Calibri"/>
+              </a:rPr>
+              <a:t>A function returns a single value, so it can sit in an expression: total = double(n) + 1.</a:t>
+            </a:r>
+          </a:p>
+          <a:p>
+            <a:pPr/>
+            <a:r>
+              <a:rPr sz="2000" b="0">
+                <a:solidFill>
+                  <a:srgbClr val="222222"/>
+                </a:solidFill>
+                <a:latin typeface="Calibri"/>
+              </a:rPr>
+              <a:t>A procedure performs a task and returns nothing; its call stands alone as a statement.</a:t>
+            </a:r>
+          </a:p>
+          <a:p>
+            <a:pPr lvl="1"/>
+            <a:r>
+              <a:rPr sz="1600" b="0">
+                <a:solidFill>
+                  <a:srgbClr val="1A365D"/>
+                </a:solidFill>
+                <a:latin typeface="Consolas"/>
+              </a:rPr>
+              <a:t>function double(n)</a:t>
+            </a:r>
+          </a:p>
+          <a:p>
+            <a:pPr lvl="1"/>
+            <a:r>
+              <a:rPr sz="1600" b="0">
+                <a:solidFill>
+                  <a:srgbClr val="1A365D"/>
+                </a:solidFill>
+                <a:latin typeface="Consolas"/>
+              </a:rPr>
+              <a:t>   return n * 2</a:t>
+            </a:r>
+          </a:p>
+          <a:p>
+            <a:pPr lvl="1"/>
+            <a:r>
+              <a:rPr sz="1600" b="0">
+                <a:solidFill>
+                  <a:srgbClr val="1A365D"/>
+                </a:solidFill>
+                <a:latin typeface="Consolas"/>
+              </a:rPr>
+              <a:t>endfunction</a:t>
+            </a:r>
+          </a:p>
+          <a:p>
+            <a:pPr lvl="1"/>
+            <a:r>
+              <a:rPr sz="1600" b="0">
+                <a:solidFill>
+                  <a:srgbClr val="1A365D"/>
+                </a:solidFill>
+                <a:latin typeface="Consolas"/>
+              </a:rPr>
+              <a:t>procedure greet(name)</a:t>
+            </a:r>
+          </a:p>
+          <a:p>
+            <a:pPr lvl="1"/>
+            <a:r>
+              <a:rPr sz="1600" b="0">
+                <a:solidFill>
+                  <a:srgbClr val="1A365D"/>
+                </a:solidFill>
+                <a:latin typeface="Consolas"/>
+              </a:rPr>
+              <a:t>   print("Hello " + name)</a:t>
+            </a:r>
+          </a:p>
+          <a:p>
+            <a:pPr lvl="1"/>
+            <a:r>
+              <a:rPr sz="1600" b="0">
+                <a:solidFill>
+                  <a:srgbClr val="1A365D"/>
+                </a:solidFill>
+                <a:latin typeface="Consolas"/>
+              </a:rPr>
+              <a:t>endprocedure</a:t>
             </a:r>
           </a:p>
         </p:txBody>
@@ -3775,7 +3867,7 @@
                 </a:solidFill>
                 <a:latin typeface="Calibri"/>
               </a:rPr>
-              <a:t>Exit ticket — answers</a:t>
+              <a:t>Parameters: by value and by reference</a:t>
             </a:r>
           </a:p>
         </p:txBody>
@@ -3802,72 +3894,994 @@
           </a:bodyPr>
           <a:lstStyle/>
           <a:p>
+            <a:pPr/>
+            <a:r>
+              <a:rPr sz="2000" b="0">
+                <a:solidFill>
+                  <a:srgbClr val="222222"/>
+                </a:solidFill>
+                <a:latin typeface="Calibri"/>
+              </a:rPr>
+              <a:t>A parameter is the variable in the definition; the argument is the value supplied at the call.</a:t>
+            </a:r>
+          </a:p>
+          <a:p>
+            <a:pPr/>
+            <a:r>
+              <a:rPr sz="2000" b="0">
+                <a:solidFill>
+                  <a:srgbClr val="222222"/>
+                </a:solidFill>
+                <a:latin typeface="Calibri"/>
+              </a:rPr>
+              <a:t>byVal passes a COPY: changes inside the subroutine do not affect the original.</a:t>
+            </a:r>
+          </a:p>
+          <a:p>
+            <a:pPr/>
+            <a:r>
+              <a:rPr sz="2000" b="0">
+                <a:solidFill>
+                  <a:srgbClr val="222222"/>
+                </a:solidFill>
+                <a:latin typeface="Calibri"/>
+              </a:rPr>
+              <a:t>byRef passes the ADDRESS: changes inside the subroutine change the original variable.</a:t>
+            </a:r>
+          </a:p>
+          <a:p>
+            <a:pPr/>
+            <a:r>
+              <a:rPr sz="2000" b="0">
+                <a:solidFill>
+                  <a:srgbClr val="222222"/>
+                </a:solidFill>
+                <a:latin typeface="Calibri"/>
+              </a:rPr>
+              <a:t>byRef avoids copying large data and lets one call send back several changes; byVal is safer.</a:t>
+            </a:r>
+          </a:p>
+          <a:p>
+            <a:pPr lvl="1"/>
+            <a:r>
+              <a:rPr sz="1600" b="0">
+                <a:solidFill>
+                  <a:srgbClr val="1A365D"/>
+                </a:solidFill>
+                <a:latin typeface="Consolas"/>
+              </a:rPr>
+              <a:t>procedure addBonus(score:byRef)</a:t>
+            </a:r>
+          </a:p>
+          <a:p>
+            <a:pPr lvl="1"/>
+            <a:r>
+              <a:rPr sz="1600" b="0">
+                <a:solidFill>
+                  <a:srgbClr val="1A365D"/>
+                </a:solidFill>
+                <a:latin typeface="Consolas"/>
+              </a:rPr>
+              <a:t>   score = score + 10</a:t>
+            </a:r>
+          </a:p>
+          <a:p>
+            <a:pPr lvl="1"/>
+            <a:r>
+              <a:rPr sz="1600" b="0">
+                <a:solidFill>
+                  <a:srgbClr val="1A365D"/>
+                </a:solidFill>
+                <a:latin typeface="Consolas"/>
+              </a:rPr>
+              <a:t>endprocedure</a:t>
+            </a:r>
+          </a:p>
+        </p:txBody>
+      </p:sp>
+    </p:spTree>
+  </p:cSld>
+  <p:clrMapOvr>
+    <a:masterClrMapping/>
+  </p:clrMapOvr>
+</p:sld>
+</file>
+
+<file path=ppt/slides/slide15.xml><?xml version="1.0" encoding="utf-8"?>
+<p:sld xmlns:a="http://schemas.openxmlformats.org/drawingml/2006/main" xmlns:p="http://schemas.openxmlformats.org/presentationml/2006/main" xmlns:r="http://schemas.openxmlformats.org/officeDocument/2006/relationships">
+  <p:cSld>
+    <p:bg>
+      <p:bgPr>
+        <a:solidFill>
+          <a:srgbClr val="FFFFFF"/>
+        </a:solidFill>
+        <a:effectLst/>
+      </p:bgPr>
+    </p:bg>
+    <p:spTree>
+      <p:nvGrpSpPr>
+        <p:cNvPr id="1" name=""/>
+        <p:cNvGrpSpPr/>
+        <p:nvPr/>
+      </p:nvGrpSpPr>
+      <p:grpSpPr/>
+      <p:sp>
+        <p:nvSpPr>
+          <p:cNvPr id="2" name="TextBox 1"/>
+          <p:cNvSpPr txBox="1"/>
+          <p:nvPr/>
+        </p:nvSpPr>
+        <p:spPr>
+          <a:xfrm>
+            <a:off x="548640" y="274320"/>
+            <a:ext cx="11064240" cy="822960"/>
+          </a:xfrm>
+          <a:prstGeom prst="rect">
+            <a:avLst/>
+          </a:prstGeom>
+          <a:noFill/>
+        </p:spPr>
+        <p:txBody>
+          <a:bodyPr wrap="square">
+            <a:spAutoFit/>
+          </a:bodyPr>
+          <a:lstStyle/>
+          <a:p>
+            <a:r>
+              <a:rPr sz="3000" b="1" i="0">
+                <a:solidFill>
+                  <a:srgbClr val="2B6CB0"/>
+                </a:solidFill>
+                <a:latin typeface="Calibri"/>
+              </a:rPr>
+              <a:t>IDE features and OOP techniques</a:t>
+            </a:r>
+          </a:p>
+        </p:txBody>
+      </p:sp>
+      <p:sp>
+        <p:nvSpPr>
+          <p:cNvPr id="3" name="TextBox 2"/>
+          <p:cNvSpPr txBox="1"/>
+          <p:nvPr/>
+        </p:nvSpPr>
+        <p:spPr>
+          <a:xfrm>
+            <a:off x="640080" y="1280160"/>
+            <a:ext cx="10881360" cy="5120640"/>
+          </a:xfrm>
+          <a:prstGeom prst="rect">
+            <a:avLst/>
+          </a:prstGeom>
+          <a:noFill/>
+        </p:spPr>
+        <p:txBody>
+          <a:bodyPr wrap="square">
+            <a:spAutoFit/>
+          </a:bodyPr>
+          <a:lstStyle/>
+          <a:p>
+            <a:pPr/>
+            <a:r>
+              <a:rPr sz="2000" b="0">
+                <a:solidFill>
+                  <a:srgbClr val="222222"/>
+                </a:solidFill>
+                <a:latin typeface="Calibri"/>
+              </a:rPr>
+              <a:t>Writing: syntax highlighting, autocomplete, auto-indentation and live error diagnostics.</a:t>
+            </a:r>
+          </a:p>
+          <a:p>
+            <a:pPr/>
+            <a:r>
+              <a:rPr sz="2000" b="0">
+                <a:solidFill>
+                  <a:srgbClr val="222222"/>
+                </a:solidFill>
+                <a:latin typeface="Calibri"/>
+              </a:rPr>
+              <a:t>Debugging: breakpoints pause execution; stepping runs a line at a time; watch windows track variables.</a:t>
+            </a:r>
+          </a:p>
+          <a:p>
+            <a:pPr/>
+            <a:r>
+              <a:rPr sz="2000" b="0">
+                <a:solidFill>
+                  <a:srgbClr val="222222"/>
+                </a:solidFill>
+                <a:latin typeface="Calibri"/>
+              </a:rPr>
+              <a:t>OOP: encapsulation keeps attributes private behind public methods, protecting data integrity.</a:t>
+            </a:r>
+          </a:p>
+          <a:p>
+            <a:pPr/>
+            <a:r>
+              <a:rPr sz="2000" b="0">
+                <a:solidFill>
+                  <a:srgbClr val="222222"/>
+                </a:solidFill>
+                <a:latin typeface="Calibri"/>
+              </a:rPr>
+              <a:t>Inheritance shares one superclass implementation; polymorphism lets the same call, e.g. speak(), behave per class via overriding.</a:t>
+            </a:r>
+          </a:p>
+          <a:p>
+            <a:pPr lvl="1"/>
+            <a:r>
+              <a:rPr sz="1600" b="0">
+                <a:solidFill>
+                  <a:srgbClr val="1A365D"/>
+                </a:solidFill>
+                <a:latin typeface="Consolas"/>
+              </a:rPr>
+              <a:t>class Dog inherits Animal</a:t>
+            </a:r>
+          </a:p>
+          <a:p>
+            <a:pPr lvl="1"/>
+            <a:r>
+              <a:rPr sz="1600" b="0">
+                <a:solidFill>
+                  <a:srgbClr val="1A365D"/>
+                </a:solidFill>
+                <a:latin typeface="Consolas"/>
+              </a:rPr>
+              <a:t>   public procedure speak()</a:t>
+            </a:r>
+          </a:p>
+          <a:p>
+            <a:pPr lvl="1"/>
+            <a:r>
+              <a:rPr sz="1600" b="0">
+                <a:solidFill>
+                  <a:srgbClr val="1A365D"/>
+                </a:solidFill>
+                <a:latin typeface="Consolas"/>
+              </a:rPr>
+              <a:t>      print("Woof")</a:t>
+            </a:r>
+          </a:p>
+          <a:p>
+            <a:pPr lvl="1"/>
+            <a:r>
+              <a:rPr sz="1600" b="0">
+                <a:solidFill>
+                  <a:srgbClr val="1A365D"/>
+                </a:solidFill>
+                <a:latin typeface="Consolas"/>
+              </a:rPr>
+              <a:t>   endprocedure</a:t>
+            </a:r>
+          </a:p>
+          <a:p>
+            <a:pPr lvl="1"/>
+            <a:r>
+              <a:rPr sz="1600" b="0">
+                <a:solidFill>
+                  <a:srgbClr val="1A365D"/>
+                </a:solidFill>
+                <a:latin typeface="Consolas"/>
+              </a:rPr>
+              <a:t>endclass</a:t>
+            </a:r>
+          </a:p>
+        </p:txBody>
+      </p:sp>
+    </p:spTree>
+  </p:cSld>
+  <p:clrMapOvr>
+    <a:masterClrMapping/>
+  </p:clrMapOvr>
+</p:sld>
+</file>
+
+<file path=ppt/slides/slide16.xml><?xml version="1.0" encoding="utf-8"?>
+<p:sld xmlns:a="http://schemas.openxmlformats.org/drawingml/2006/main" xmlns:p="http://schemas.openxmlformats.org/presentationml/2006/main" xmlns:r="http://schemas.openxmlformats.org/officeDocument/2006/relationships">
+  <p:cSld>
+    <p:bg>
+      <p:bgPr>
+        <a:solidFill>
+          <a:srgbClr val="FFFFFF"/>
+        </a:solidFill>
+        <a:effectLst/>
+      </p:bgPr>
+    </p:bg>
+    <p:spTree>
+      <p:nvGrpSpPr>
+        <p:cNvPr id="1" name=""/>
+        <p:cNvGrpSpPr/>
+        <p:nvPr/>
+      </p:nvGrpSpPr>
+      <p:grpSpPr/>
+      <p:sp>
+        <p:nvSpPr>
+          <p:cNvPr id="2" name="TextBox 1"/>
+          <p:cNvSpPr txBox="1"/>
+          <p:nvPr/>
+        </p:nvSpPr>
+        <p:spPr>
+          <a:xfrm>
+            <a:off x="548640" y="274320"/>
+            <a:ext cx="11064240" cy="822960"/>
+          </a:xfrm>
+          <a:prstGeom prst="rect">
+            <a:avLst/>
+          </a:prstGeom>
+          <a:noFill/>
+        </p:spPr>
+        <p:txBody>
+          <a:bodyPr wrap="square">
+            <a:spAutoFit/>
+          </a:bodyPr>
+          <a:lstStyle/>
+          <a:p>
+            <a:r>
+              <a:rPr sz="3000" b="1" i="0">
+                <a:solidFill>
+                  <a:srgbClr val="2B6CB0"/>
+                </a:solidFill>
+                <a:latin typeface="Calibri"/>
+              </a:rPr>
+              <a:t>Worked example 1</a:t>
+            </a:r>
+          </a:p>
+        </p:txBody>
+      </p:sp>
+      <p:sp>
+        <p:nvSpPr>
+          <p:cNvPr id="3" name="TextBox 2"/>
+          <p:cNvSpPr txBox="1"/>
+          <p:nvPr/>
+        </p:nvSpPr>
+        <p:spPr>
+          <a:xfrm>
+            <a:off x="640080" y="1280160"/>
+            <a:ext cx="10881360" cy="5120640"/>
+          </a:xfrm>
+          <a:prstGeom prst="rect">
+            <a:avLst/>
+          </a:prstGeom>
+          <a:noFill/>
+        </p:spPr>
+        <p:txBody>
+          <a:bodyPr wrap="square">
+            <a:spAutoFit/>
+          </a:bodyPr>
+          <a:lstStyle/>
+          <a:p>
+            <a:pPr/>
             <a:r>
               <a:rPr sz="2200" b="1">
                 <a:solidFill>
-                  <a:srgbClr val="222222"/>
-                </a:solidFill>
-                <a:latin typeface="Calibri"/>
-              </a:rPr>
-              <a:t>1. Why does a recursive routine with no reachable base case crash, and what is the error called?</a:t>
-            </a:r>
-          </a:p>
-          <a:p>
-            <a:pPr lvl="1"/>
-            <a:r>
-              <a:rPr sz="1800" i="1">
+                  <a:srgbClr val="2B6CB0"/>
+                </a:solidFill>
+                <a:latin typeface="Calibri"/>
+              </a:rPr>
+              <a:t>Tracing factorial(4) on the call stack</a:t>
+            </a:r>
+          </a:p>
+          <a:p>
+            <a:pPr lvl="1"/>
+            <a:r>
+              <a:rPr sz="1900" b="0">
+                <a:solidFill>
+                  <a:srgbClr val="222222"/>
+                </a:solidFill>
+                <a:latin typeface="Calibri"/>
+              </a:rPr>
+              <a:t>1. The function: if n &lt;= 1 return 1, else return n * factorial(n - 1).</a:t>
+            </a:r>
+          </a:p>
+          <a:p>
+            <a:pPr lvl="1"/>
+            <a:r>
+              <a:rPr sz="1900" b="0">
+                <a:solidFill>
+                  <a:srgbClr val="222222"/>
+                </a:solidFill>
+                <a:latin typeface="Calibri"/>
+              </a:rPr>
+              <a:t>2. factorial(4): 4 is not &lt;= 1, so push frame (n = 4) and call factorial(3).</a:t>
+            </a:r>
+          </a:p>
+          <a:p>
+            <a:pPr lvl="1"/>
+            <a:r>
+              <a:rPr sz="1900" b="0">
+                <a:solidFill>
+                  <a:srgbClr val="222222"/>
+                </a:solidFill>
+                <a:latin typeface="Calibri"/>
+              </a:rPr>
+              <a:t>3. factorial(3) pushes (n = 3) and calls factorial(2); factorial(2) pushes (n = 2) and calls factorial(1). Four frames are stacked.</a:t>
+            </a:r>
+          </a:p>
+          <a:p>
+            <a:pPr lvl="1"/>
+            <a:r>
+              <a:rPr sz="1900" b="0">
+                <a:solidFill>
+                  <a:srgbClr val="222222"/>
+                </a:solidFill>
+                <a:latin typeface="Calibri"/>
+              </a:rPr>
+              <a:t>4. factorial(1): n &lt;= 1 is true - the base case returns 1 with no further call.</a:t>
+            </a:r>
+          </a:p>
+          <a:p>
+            <a:pPr lvl="1"/>
+            <a:r>
+              <a:rPr sz="1900" b="0">
+                <a:solidFill>
+                  <a:srgbClr val="222222"/>
+                </a:solidFill>
+                <a:latin typeface="Calibri"/>
+              </a:rPr>
+              <a:t>5. Frames pop in LIFO order: factorial(2) returns 2 * 1 = 2; factorial(3) returns 3 * 2 = 6; factorial(4) returns 4 * 6 = 24.</a:t>
+            </a:r>
+          </a:p>
+          <a:p>
+            <a:pPr lvl="1"/>
+            <a:r>
+              <a:rPr sz="1900" b="0">
+                <a:solidFill>
+                  <a:srgbClr val="222222"/>
+                </a:solidFill>
+                <a:latin typeface="Calibri"/>
+              </a:rPr>
+              <a:t>6. The stack is empty and the final value is 24. Check: 4 x 3 x 2 x 1 = 24.</a:t>
+            </a:r>
+          </a:p>
+          <a:p>
+            <a:pPr lvl="1"/>
+            <a:r>
+              <a:rPr sz="1900" b="0">
+                <a:solidFill>
+                  <a:srgbClr val="222222"/>
+                </a:solidFill>
+                <a:latin typeface="Calibri"/>
+              </a:rPr>
+              <a:t>7. Maximum stack depth was 4 frames - an iterative version would have used one variable throughout.</a:t>
+            </a:r>
+          </a:p>
+        </p:txBody>
+      </p:sp>
+    </p:spTree>
+  </p:cSld>
+  <p:clrMapOvr>
+    <a:masterClrMapping/>
+  </p:clrMapOvr>
+</p:sld>
+</file>
+
+<file path=ppt/slides/slide17.xml><?xml version="1.0" encoding="utf-8"?>
+<p:sld xmlns:a="http://schemas.openxmlformats.org/drawingml/2006/main" xmlns:p="http://schemas.openxmlformats.org/presentationml/2006/main" xmlns:r="http://schemas.openxmlformats.org/officeDocument/2006/relationships">
+  <p:cSld>
+    <p:bg>
+      <p:bgPr>
+        <a:solidFill>
+          <a:srgbClr val="FFFFFF"/>
+        </a:solidFill>
+        <a:effectLst/>
+      </p:bgPr>
+    </p:bg>
+    <p:spTree>
+      <p:nvGrpSpPr>
+        <p:cNvPr id="1" name=""/>
+        <p:cNvGrpSpPr/>
+        <p:nvPr/>
+      </p:nvGrpSpPr>
+      <p:grpSpPr/>
+      <p:sp>
+        <p:nvSpPr>
+          <p:cNvPr id="2" name="TextBox 1"/>
+          <p:cNvSpPr txBox="1"/>
+          <p:nvPr/>
+        </p:nvSpPr>
+        <p:spPr>
+          <a:xfrm>
+            <a:off x="548640" y="274320"/>
+            <a:ext cx="11064240" cy="822960"/>
+          </a:xfrm>
+          <a:prstGeom prst="rect">
+            <a:avLst/>
+          </a:prstGeom>
+          <a:noFill/>
+        </p:spPr>
+        <p:txBody>
+          <a:bodyPr wrap="square">
+            <a:spAutoFit/>
+          </a:bodyPr>
+          <a:lstStyle/>
+          <a:p>
+            <a:r>
+              <a:rPr sz="3000" b="1" i="0">
+                <a:solidFill>
+                  <a:srgbClr val="2B6CB0"/>
+                </a:solidFill>
+                <a:latin typeface="Calibri"/>
+              </a:rPr>
+              <a:t>Worked example 2</a:t>
+            </a:r>
+          </a:p>
+        </p:txBody>
+      </p:sp>
+      <p:sp>
+        <p:nvSpPr>
+          <p:cNvPr id="3" name="TextBox 2"/>
+          <p:cNvSpPr txBox="1"/>
+          <p:nvPr/>
+        </p:nvSpPr>
+        <p:spPr>
+          <a:xfrm>
+            <a:off x="640080" y="1280160"/>
+            <a:ext cx="10881360" cy="5120640"/>
+          </a:xfrm>
+          <a:prstGeom prst="rect">
+            <a:avLst/>
+          </a:prstGeom>
+          <a:noFill/>
+        </p:spPr>
+        <p:txBody>
+          <a:bodyPr wrap="square">
+            <a:spAutoFit/>
+          </a:bodyPr>
+          <a:lstStyle/>
+          <a:p>
+            <a:pPr/>
+            <a:r>
+              <a:rPr sz="2200" b="1">
+                <a:solidFill>
+                  <a:srgbClr val="2B6CB0"/>
+                </a:solidFill>
+                <a:latin typeface="Calibri"/>
+              </a:rPr>
+              <a:t>byVal versus byRef: the same procedure, two outcomes</a:t>
+            </a:r>
+          </a:p>
+          <a:p>
+            <a:pPr lvl="1"/>
+            <a:r>
+              <a:rPr sz="1900" b="0">
+                <a:solidFill>
+                  <a:srgbClr val="222222"/>
+                </a:solidFill>
+                <a:latin typeface="Calibri"/>
+              </a:rPr>
+              <a:t>1. Setup: playerScore = 50, and procedure addBonus(score:byVal) with body score = score + 10, then print inside the procedure.</a:t>
+            </a:r>
+          </a:p>
+          <a:p>
+            <a:pPr lvl="1"/>
+            <a:r>
+              <a:rPr sz="1900" b="0">
+                <a:solidFill>
+                  <a:srgbClr val="222222"/>
+                </a:solidFill>
+                <a:latin typeface="Calibri"/>
+              </a:rPr>
+              <a:t>2. Call addBonus(playerScore) byVal: a COPY of 50 is passed in.</a:t>
+            </a:r>
+          </a:p>
+          <a:p>
+            <a:pPr lvl="1"/>
+            <a:r>
+              <a:rPr sz="1900" b="0">
+                <a:solidFill>
+                  <a:srgbClr val="222222"/>
+                </a:solidFill>
+                <a:latin typeface="Calibri"/>
+              </a:rPr>
+              <a:t>3. Inside, the copy becomes 60 and prints 60; the copy is destroyed when the procedure ends.</a:t>
+            </a:r>
+          </a:p>
+          <a:p>
+            <a:pPr lvl="1"/>
+            <a:r>
+              <a:rPr sz="1900" b="0">
+                <a:solidFill>
+                  <a:srgbClr val="222222"/>
+                </a:solidFill>
+                <a:latin typeface="Calibri"/>
+              </a:rPr>
+              <a:t>4. After the call, playerScore prints 50 - the original was never touched.</a:t>
+            </a:r>
+          </a:p>
+          <a:p>
+            <a:pPr lvl="1"/>
+            <a:r>
+              <a:rPr sz="1900" b="0">
+                <a:solidFill>
+                  <a:srgbClr val="222222"/>
+                </a:solidFill>
+                <a:latin typeface="Calibri"/>
+              </a:rPr>
+              <a:t>5. Now change the signature to score:byRef and run again: the ADDRESS of playerScore is passed.</a:t>
+            </a:r>
+          </a:p>
+          <a:p>
+            <a:pPr lvl="1"/>
+            <a:r>
+              <a:rPr sz="1900" b="0">
+                <a:solidFill>
+                  <a:srgbClr val="222222"/>
+                </a:solidFill>
+                <a:latin typeface="Calibri"/>
+              </a:rPr>
+              <a:t>6. Inside, writing score = score + 10 updates memory at that address: 60 prints inside.</a:t>
+            </a:r>
+          </a:p>
+          <a:p>
+            <a:pPr lvl="1"/>
+            <a:r>
+              <a:rPr sz="1900" b="0">
+                <a:solidFill>
+                  <a:srgbClr val="222222"/>
+                </a:solidFill>
+                <a:latin typeface="Calibri"/>
+              </a:rPr>
+              <a:t>7. After the call, playerScore prints 60. The exam sentence is the consequence: byVal leaves the original unchanged; byRef changes it.</a:t>
+            </a:r>
+          </a:p>
+        </p:txBody>
+      </p:sp>
+    </p:spTree>
+  </p:cSld>
+  <p:clrMapOvr>
+    <a:masterClrMapping/>
+  </p:clrMapOvr>
+</p:sld>
+</file>
+
+<file path=ppt/slides/slide18.xml><?xml version="1.0" encoding="utf-8"?>
+<p:sld xmlns:a="http://schemas.openxmlformats.org/drawingml/2006/main" xmlns:p="http://schemas.openxmlformats.org/presentationml/2006/main" xmlns:r="http://schemas.openxmlformats.org/officeDocument/2006/relationships">
+  <p:cSld>
+    <p:bg>
+      <p:bgPr>
+        <a:solidFill>
+          <a:srgbClr val="FFFFFF"/>
+        </a:solidFill>
+        <a:effectLst/>
+      </p:bgPr>
+    </p:bg>
+    <p:spTree>
+      <p:nvGrpSpPr>
+        <p:cNvPr id="1" name=""/>
+        <p:cNvGrpSpPr/>
+        <p:nvPr/>
+      </p:nvGrpSpPr>
+      <p:grpSpPr/>
+      <p:sp>
+        <p:nvSpPr>
+          <p:cNvPr id="2" name="TextBox 1"/>
+          <p:cNvSpPr txBox="1"/>
+          <p:nvPr/>
+        </p:nvSpPr>
+        <p:spPr>
+          <a:xfrm>
+            <a:off x="548640" y="274320"/>
+            <a:ext cx="11064240" cy="822960"/>
+          </a:xfrm>
+          <a:prstGeom prst="rect">
+            <a:avLst/>
+          </a:prstGeom>
+          <a:noFill/>
+        </p:spPr>
+        <p:txBody>
+          <a:bodyPr wrap="square">
+            <a:spAutoFit/>
+          </a:bodyPr>
+          <a:lstStyle/>
+          <a:p>
+            <a:r>
+              <a:rPr sz="3000" b="1" i="0">
+                <a:solidFill>
+                  <a:srgbClr val="2B6CB0"/>
+                </a:solidFill>
+                <a:latin typeface="Calibri"/>
+              </a:rPr>
+              <a:t>Worked example 3</a:t>
+            </a:r>
+          </a:p>
+        </p:txBody>
+      </p:sp>
+      <p:sp>
+        <p:nvSpPr>
+          <p:cNvPr id="3" name="TextBox 2"/>
+          <p:cNvSpPr txBox="1"/>
+          <p:nvPr/>
+        </p:nvSpPr>
+        <p:spPr>
+          <a:xfrm>
+            <a:off x="640080" y="1280160"/>
+            <a:ext cx="10881360" cy="5120640"/>
+          </a:xfrm>
+          <a:prstGeom prst="rect">
+            <a:avLst/>
+          </a:prstGeom>
+          <a:noFill/>
+        </p:spPr>
+        <p:txBody>
+          <a:bodyPr wrap="square">
+            <a:spAutoFit/>
+          </a:bodyPr>
+          <a:lstStyle/>
+          <a:p>
+            <a:pPr/>
+            <a:r>
+              <a:rPr sz="2200" b="1">
+                <a:solidFill>
+                  <a:srgbClr val="2B6CB0"/>
+                </a:solidFill>
+                <a:latin typeface="Calibri"/>
+              </a:rPr>
+              <a:t>Predicting loop output: while versus do until</a:t>
+            </a:r>
+          </a:p>
+          <a:p>
+            <a:pPr lvl="1"/>
+            <a:r>
+              <a:rPr sz="1900" b="0">
+                <a:solidFill>
+                  <a:srgbClr val="222222"/>
+                </a:solidFill>
+                <a:latin typeface="Calibri"/>
+              </a:rPr>
+              <a:t>1. Code: x = 10; while x &gt; 20: print(x), x = x - 2, endwhile; print("A"); do: print(x), x = x - 2, until x &lt; 6; print("B").</a:t>
+            </a:r>
+          </a:p>
+          <a:p>
+            <a:pPr lvl="1"/>
+            <a:r>
+              <a:rPr sz="1900" b="0">
+                <a:solidFill>
+                  <a:srgbClr val="222222"/>
+                </a:solidFill>
+                <a:latin typeface="Calibri"/>
+              </a:rPr>
+              <a:t>2. The while loop tests first: 10 &gt; 20 is false, so the body runs ZERO times - nothing prints.</a:t>
+            </a:r>
+          </a:p>
+          <a:p>
+            <a:pPr lvl="1"/>
+            <a:r>
+              <a:rPr sz="1900" b="0">
+                <a:solidFill>
+                  <a:srgbClr val="222222"/>
+                </a:solidFill>
+                <a:latin typeface="Calibri"/>
+              </a:rPr>
+              <a:t>3. print("A") outputs A.</a:t>
+            </a:r>
+          </a:p>
+          <a:p>
+            <a:pPr lvl="1"/>
+            <a:r>
+              <a:rPr sz="1900" b="0">
+                <a:solidFill>
+                  <a:srgbClr val="222222"/>
+                </a:solidFill>
+                <a:latin typeface="Calibri"/>
+              </a:rPr>
+              <a:t>4. The do until body runs before any test: prints 10, x becomes 8; 8 &lt; 6 false, loop again.</a:t>
+            </a:r>
+          </a:p>
+          <a:p>
+            <a:pPr lvl="1"/>
+            <a:r>
+              <a:rPr sz="1900" b="0">
+                <a:solidFill>
+                  <a:srgbClr val="222222"/>
+                </a:solidFill>
+                <a:latin typeface="Calibri"/>
+              </a:rPr>
+              <a:t>5. Prints 8, x becomes 6; 6 &lt; 6 false, loop again. Prints 6, x becomes 4; 4 &lt; 6 true, loop ends.</a:t>
+            </a:r>
+          </a:p>
+          <a:p>
+            <a:pPr lvl="1"/>
+            <a:r>
+              <a:rPr sz="1900" b="0">
+                <a:solidFill>
+                  <a:srgbClr val="222222"/>
+                </a:solidFill>
+                <a:latin typeface="Calibri"/>
+              </a:rPr>
+              <a:t>6. print("B") outputs B. Full output: A, 10, 8, 6, B.</a:t>
+            </a:r>
+          </a:p>
+          <a:p>
+            <a:pPr lvl="1"/>
+            <a:r>
+              <a:rPr sz="1900" b="0">
+                <a:solidFill>
+                  <a:srgbClr val="222222"/>
+                </a:solidFill>
+                <a:latin typeface="Calibri"/>
+              </a:rPr>
+              <a:t>7. The trap: assuming the while prints 10 once - a pre-conditioned loop can run zero times; a post-conditioned loop cannot.</a:t>
+            </a:r>
+          </a:p>
+        </p:txBody>
+      </p:sp>
+    </p:spTree>
+  </p:cSld>
+  <p:clrMapOvr>
+    <a:masterClrMapping/>
+  </p:clrMapOvr>
+</p:sld>
+</file>
+
+<file path=ppt/slides/slide19.xml><?xml version="1.0" encoding="utf-8"?>
+<p:sld xmlns:a="http://schemas.openxmlformats.org/drawingml/2006/main" xmlns:p="http://schemas.openxmlformats.org/presentationml/2006/main" xmlns:r="http://schemas.openxmlformats.org/officeDocument/2006/relationships">
+  <p:cSld>
+    <p:bg>
+      <p:bgPr>
+        <a:solidFill>
+          <a:srgbClr val="FFFFFF"/>
+        </a:solidFill>
+        <a:effectLst/>
+      </p:bgPr>
+    </p:bg>
+    <p:spTree>
+      <p:nvGrpSpPr>
+        <p:cNvPr id="1" name=""/>
+        <p:cNvGrpSpPr/>
+        <p:nvPr/>
+      </p:nvGrpSpPr>
+      <p:grpSpPr/>
+      <p:sp>
+        <p:nvSpPr>
+          <p:cNvPr id="2" name="TextBox 1"/>
+          <p:cNvSpPr txBox="1"/>
+          <p:nvPr/>
+        </p:nvSpPr>
+        <p:spPr>
+          <a:xfrm>
+            <a:off x="548640" y="274320"/>
+            <a:ext cx="11064240" cy="822960"/>
+          </a:xfrm>
+          <a:prstGeom prst="rect">
+            <a:avLst/>
+          </a:prstGeom>
+          <a:noFill/>
+        </p:spPr>
+        <p:txBody>
+          <a:bodyPr wrap="square">
+            <a:spAutoFit/>
+          </a:bodyPr>
+          <a:lstStyle/>
+          <a:p>
+            <a:r>
+              <a:rPr sz="3000" b="1" i="0">
+                <a:solidFill>
+                  <a:srgbClr val="2B6CB0"/>
+                </a:solidFill>
+                <a:latin typeface="Calibri"/>
+              </a:rPr>
+              <a:t>Activity 1</a:t>
+            </a:r>
+          </a:p>
+        </p:txBody>
+      </p:sp>
+      <p:sp>
+        <p:nvSpPr>
+          <p:cNvPr id="3" name="TextBox 2"/>
+          <p:cNvSpPr txBox="1"/>
+          <p:nvPr/>
+        </p:nvSpPr>
+        <p:spPr>
+          <a:xfrm>
+            <a:off x="640080" y="1280160"/>
+            <a:ext cx="10881360" cy="5120640"/>
+          </a:xfrm>
+          <a:prstGeom prst="rect">
+            <a:avLst/>
+          </a:prstGeom>
+          <a:noFill/>
+        </p:spPr>
+        <p:txBody>
+          <a:bodyPr wrap="square">
+            <a:spAutoFit/>
+          </a:bodyPr>
+          <a:lstStyle/>
+          <a:p>
+            <a:pPr/>
+            <a:r>
+              <a:rPr sz="2200" b="1">
+                <a:solidFill>
+                  <a:srgbClr val="2B6CB0"/>
+                </a:solidFill>
+                <a:latin typeface="Calibri"/>
+              </a:rPr>
+              <a:t>Russian Dolls and the Tray Stack  (15 min)</a:t>
+            </a:r>
+          </a:p>
+          <a:p>
+            <a:pPr lvl="1"/>
+            <a:r>
+              <a:rPr sz="2000" b="0">
+                <a:solidFill>
+                  <a:srgbClr val="222222"/>
+                </a:solidFill>
+                <a:latin typeface="Calibri"/>
+              </a:rPr>
+              <a:t>Open a set of nested dolls: each contains a smaller version of the same problem - recursion; the tiny solid doll is the base case. Reassemble to show returns happening in reverse.</a:t>
+            </a:r>
+          </a:p>
+          <a:p>
+            <a:pPr lvl="1"/>
+            <a:r>
+              <a:rPr sz="2000" b="0">
+                <a:solidFill>
+                  <a:srgbClr val="222222"/>
+                </a:solidFill>
+                <a:latin typeface="Calibri"/>
+              </a:rPr>
+              <a:t>Board the factorial function, then give four volunteers a tray each. Student 1 writes n = 4 plus the return address on a sticky note and holds their tray; they cannot answer yet, so Student 2 stacks n = 3 on top, then n = 2, then n = 1.</a:t>
+            </a:r>
+          </a:p>
+          <a:p>
+            <a:pPr lvl="1"/>
+            <a:r>
+              <a:rPr sz="2000" b="0">
+                <a:solidFill>
+                  <a:srgbClr val="222222"/>
+                </a:solidFill>
+                <a:latin typeface="Calibri"/>
+              </a:rPr>
+              <a:t>Student 4 hits the base case: n = 1, announces return 1, and pops off the top.</a:t>
+            </a:r>
+          </a:p>
+          <a:p>
+            <a:pPr lvl="1"/>
+            <a:r>
+              <a:rPr sz="2000" b="0">
+                <a:solidFill>
+                  <a:srgbClr val="222222"/>
+                </a:solidFill>
+                <a:latin typeface="Calibri"/>
+              </a:rPr>
+              <a:t>Unwind: Student 3 computes 2 x 1 = 2 and pops; Student 2 computes 3 x 2 = 6; Student 1 computes 4 x 6 = 24 and shouts the answer.</a:t>
+            </a:r>
+          </a:p>
+          <a:p>
+            <a:pPr lvl="1"/>
+            <a:r>
+              <a:rPr sz="2000" b="0">
+                <a:solidFill>
+                  <a:srgbClr val="222222"/>
+                </a:solidFill>
+                <a:latin typeface="Calibri"/>
+              </a:rPr>
+              <a:t>Ask: what order did trays go on and come off? (LIFO - this pile IS the call stack; each tray is a frame holding a parameter and return address.)</a:t>
+            </a:r>
+          </a:p>
+          <a:p>
+            <a:pPr lvl="1"/>
+            <a:r>
+              <a:rPr sz="2000" b="0">
+                <a:solidFill>
+                  <a:srgbClr val="222222"/>
+                </a:solidFill>
+                <a:latin typeface="Calibri"/>
+              </a:rPr>
+              <a:t>Cross out the base case and ask what happens to the pile. (It grows until the canteen runs out of trays: stack overflow.)</a:t>
+            </a:r>
+          </a:p>
+          <a:p>
+            <a:pPr/>
+            <a:r>
+              <a:rPr sz="1800" b="0">
                 <a:solidFill>
                   <a:srgbClr val="B76E00"/>
                 </a:solidFill>
                 <a:latin typeface="Calibri"/>
               </a:rPr>
-              <a:t>Answer: Each call pushes another stack frame and they never stop, so memory is exhausted, causing a stack overflow.</a:t>
-            </a:r>
-          </a:p>
-          <a:p>
-            <a:r>
-              <a:rPr sz="2200" b="1">
-                <a:solidFill>
-                  <a:srgbClr val="222222"/>
-                </a:solidFill>
-                <a:latin typeface="Calibri"/>
-              </a:rPr>
-              <a:t>2. A global total = 10; inside a procedure an assignment total = 5 then print(total) runs, then print(total) runs in the main program. What two values print and why?</a:t>
-            </a:r>
-          </a:p>
-          <a:p>
-            <a:pPr lvl="1"/>
-            <a:r>
-              <a:rPr sz="1800" i="1">
-                <a:solidFill>
-                  <a:srgbClr val="B76E00"/>
-                </a:solidFill>
-                <a:latin typeface="Calibri"/>
-              </a:rPr>
-              <a:t>Answer: 5 then 10: the assignment creates a local total (scope = the procedure) that shadows but does not change the global, which stays 10.</a:t>
-            </a:r>
-          </a:p>
-          <a:p>
-            <a:r>
-              <a:rPr sz="2200" b="1">
-                <a:solidFill>
-                  <a:srgbClr val="222222"/>
-                </a:solidFill>
-                <a:latin typeface="Calibri"/>
-              </a:rPr>
-              <a:t>3. In OCR pseudocode, why must getBalance() be written as a function rather than a procedure?</a:t>
-            </a:r>
-          </a:p>
-          <a:p>
-            <a:pPr lvl="1"/>
-            <a:r>
-              <a:rPr sz="1800" i="1">
-                <a:solidFill>
-                  <a:srgbClr val="B76E00"/>
-                </a:solidFill>
-                <a:latin typeface="Calibri"/>
-              </a:rPr>
-              <a:t>Answer: It returns a single value (the balance), and only a function returns a value; a procedure would return nothing.</a:t>
+              <a:t>Stretch: Trace factorial(0) with base case n == 1: never reached, so it overflows; fix it by changing the base case to n &lt;= 1, then rewrite factorial iteratively and state the memory trade-off.</a:t>
             </a:r>
           </a:p>
         </p:txBody>
@@ -3974,7 +4988,7 @@
                 </a:solidFill>
                 <a:latin typeface="Calibri"/>
               </a:rPr>
-              <a:t>Describe and distinguish the programming constructs (sequence, selection, count- and condition-controlled iteration), recursion, scope, modularity and OOP</a:t>
+              <a:t>I can use sequence, branching and both count- and condition-controlled iteration in OCR Exam Reference Language.</a:t>
             </a:r>
           </a:p>
           <a:p>
@@ -3986,7 +5000,7 @@
                 </a:solidFill>
                 <a:latin typeface="Calibri"/>
               </a:rPr>
-              <a:t>Explain how recursion uses a base case and a call stack of frames, and contrast it with iteration</a:t>
+              <a:t>I can trace a recursive subroutine using stack frames, identify its base case, and compare recursion with iteration.</a:t>
             </a:r>
           </a:p>
           <a:p>
@@ -3998,7 +5012,1477 @@
                 </a:solidFill>
                 <a:latin typeface="Calibri"/>
               </a:rPr>
-              <a:t>Apply scope rules, parameter passing (by value vs by reference) and OOP concepts (encapsulation, inheritance, polymorphism) when reading and writing OCR pseudocode</a:t>
+              <a:t>I can explain scope, distinguish functions from procedures, and predict the effect of passing parameters by value and by reference.</a:t>
+            </a:r>
+          </a:p>
+          <a:p>
+            <a:pPr lvl="1"/>
+            <a:r>
+              <a:rPr sz="2200" b="0">
+                <a:solidFill>
+                  <a:srgbClr val="222222"/>
+                </a:solidFill>
+                <a:latin typeface="Calibri"/>
+              </a:rPr>
+              <a:t>I can describe IDE features that help build and debug code, and apply OOP techniques: encapsulation, inheritance and polymorphism.</a:t>
+            </a:r>
+          </a:p>
+        </p:txBody>
+      </p:sp>
+    </p:spTree>
+  </p:cSld>
+  <p:clrMapOvr>
+    <a:masterClrMapping/>
+  </p:clrMapOvr>
+</p:sld>
+</file>
+
+<file path=ppt/slides/slide20.xml><?xml version="1.0" encoding="utf-8"?>
+<p:sld xmlns:a="http://schemas.openxmlformats.org/drawingml/2006/main" xmlns:p="http://schemas.openxmlformats.org/presentationml/2006/main" xmlns:r="http://schemas.openxmlformats.org/officeDocument/2006/relationships">
+  <p:cSld>
+    <p:bg>
+      <p:bgPr>
+        <a:solidFill>
+          <a:srgbClr val="FFFFFF"/>
+        </a:solidFill>
+        <a:effectLst/>
+      </p:bgPr>
+    </p:bg>
+    <p:spTree>
+      <p:nvGrpSpPr>
+        <p:cNvPr id="1" name=""/>
+        <p:cNvGrpSpPr/>
+        <p:nvPr/>
+      </p:nvGrpSpPr>
+      <p:grpSpPr/>
+      <p:sp>
+        <p:nvSpPr>
+          <p:cNvPr id="2" name="TextBox 1"/>
+          <p:cNvSpPr txBox="1"/>
+          <p:nvPr/>
+        </p:nvSpPr>
+        <p:spPr>
+          <a:xfrm>
+            <a:off x="548640" y="274320"/>
+            <a:ext cx="11064240" cy="822960"/>
+          </a:xfrm>
+          <a:prstGeom prst="rect">
+            <a:avLst/>
+          </a:prstGeom>
+          <a:noFill/>
+        </p:spPr>
+        <p:txBody>
+          <a:bodyPr wrap="square">
+            <a:spAutoFit/>
+          </a:bodyPr>
+          <a:lstStyle/>
+          <a:p>
+            <a:r>
+              <a:rPr sz="3000" b="1" i="0">
+                <a:solidFill>
+                  <a:srgbClr val="2B6CB0"/>
+                </a:solidFill>
+                <a:latin typeface="Calibri"/>
+              </a:rPr>
+              <a:t>Activity 2</a:t>
+            </a:r>
+          </a:p>
+        </p:txBody>
+      </p:sp>
+      <p:sp>
+        <p:nvSpPr>
+          <p:cNvPr id="3" name="TextBox 2"/>
+          <p:cNvSpPr txBox="1"/>
+          <p:nvPr/>
+        </p:nvSpPr>
+        <p:spPr>
+          <a:xfrm>
+            <a:off x="640080" y="1280160"/>
+            <a:ext cx="10881360" cy="5120640"/>
+          </a:xfrm>
+          <a:prstGeom prst="rect">
+            <a:avLst/>
+          </a:prstGeom>
+          <a:noFill/>
+        </p:spPr>
+        <p:txBody>
+          <a:bodyPr wrap="square">
+            <a:spAutoFit/>
+          </a:bodyPr>
+          <a:lstStyle/>
+          <a:p>
+            <a:pPr/>
+            <a:r>
+              <a:rPr sz="2200" b="1">
+                <a:solidFill>
+                  <a:srgbClr val="2B6CB0"/>
+                </a:solidFill>
+                <a:latin typeface="Calibri"/>
+              </a:rPr>
+              <a:t>Parson's Problem: The Bouncer's Loop  (10 min)</a:t>
+            </a:r>
+          </a:p>
+          <a:p>
+            <a:pPr lvl="1"/>
+            <a:r>
+              <a:rPr sz="2000" b="0">
+                <a:solidFill>
+                  <a:srgbClr val="222222"/>
+                </a:solidFill>
+                <a:latin typeface="Calibri"/>
+              </a:rPr>
+              <a:t>Brief: the program must keep asking for an age until it gets 11-18 inclusive, telling the user off after each bad attempt, and must ask at least once. One strip is a red herring.</a:t>
+            </a:r>
+          </a:p>
+          <a:p>
+            <a:pPr lvl="1"/>
+            <a:r>
+              <a:rPr sz="2000" b="0">
+                <a:solidFill>
+                  <a:srgbClr val="222222"/>
+                </a:solidFill>
+                <a:latin typeface="Calibri"/>
+              </a:rPr>
+              <a:t>Strips (shuffled): until age &gt;= 11 AND age &lt;= 18 / age = int(input("Enter age (11-18): ")) / do / print("Thanks, age recorded: " + str(age)) / if age &lt; 11 OR age &gt; 18 then / print("Out of range - try again") / endif / while age &gt;= 11 AND age &lt;= 18 (distractor).</a:t>
+            </a:r>
+          </a:p>
+          <a:p>
+            <a:pPr lvl="1"/>
+            <a:r>
+              <a:rPr sz="2000" b="0">
+                <a:solidFill>
+                  <a:srgbClr val="222222"/>
+                </a:solidFill>
+                <a:latin typeface="Calibri"/>
+              </a:rPr>
+              <a:t>Pairs arrange the strips; before checking, they must trace inputs 9, 25, 14 on a mini-whiteboard.</a:t>
+            </a:r>
+          </a:p>
+          <a:p>
+            <a:pPr lvl="1"/>
+            <a:r>
+              <a:rPr sz="2000" b="0">
+                <a:solidFill>
+                  <a:srgbClr val="222222"/>
+                </a:solidFill>
+                <a:latin typeface="Calibri"/>
+              </a:rPr>
+              <a:t>Correct order: do; input; if out of range then; warning print; endif; until in range; thanks print. Trace output: two warnings, then Thanks, age recorded: 14.</a:t>
+            </a:r>
+          </a:p>
+          <a:p>
+            <a:pPr lvl="1"/>
+            <a:r>
+              <a:rPr sz="2000" b="0">
+                <a:solidFill>
+                  <a:srgbClr val="222222"/>
+                </a:solidFill>
+                <a:latin typeface="Calibri"/>
+              </a:rPr>
+              <a:t>Debrief: why do ... until and not while? Post-conditioned - the body always runs, so the user is always asked; a while would test age before it holds a sensible value.</a:t>
+            </a:r>
+          </a:p>
+          <a:p>
+            <a:pPr/>
+            <a:r>
+              <a:rPr sz="1800" b="0">
+                <a:solidFill>
+                  <a:srgbClr val="B76E00"/>
+                </a:solidFill>
+                <a:latin typeface="Calibri"/>
+              </a:rPr>
+              <a:t>Stretch: Rewrite the validation with while (needs a priming input or a valid flag); which version repeats less code? Then extend it to reject non-numeric input.</a:t>
+            </a:r>
+          </a:p>
+        </p:txBody>
+      </p:sp>
+    </p:spTree>
+  </p:cSld>
+  <p:clrMapOvr>
+    <a:masterClrMapping/>
+  </p:clrMapOvr>
+</p:sld>
+</file>
+
+<file path=ppt/slides/slide21.xml><?xml version="1.0" encoding="utf-8"?>
+<p:sld xmlns:a="http://schemas.openxmlformats.org/drawingml/2006/main" xmlns:p="http://schemas.openxmlformats.org/presentationml/2006/main" xmlns:r="http://schemas.openxmlformats.org/officeDocument/2006/relationships">
+  <p:cSld>
+    <p:bg>
+      <p:bgPr>
+        <a:solidFill>
+          <a:srgbClr val="FFFFFF"/>
+        </a:solidFill>
+        <a:effectLst/>
+      </p:bgPr>
+    </p:bg>
+    <p:spTree>
+      <p:nvGrpSpPr>
+        <p:cNvPr id="1" name=""/>
+        <p:cNvGrpSpPr/>
+        <p:nvPr/>
+      </p:nvGrpSpPr>
+      <p:grpSpPr/>
+      <p:sp>
+        <p:nvSpPr>
+          <p:cNvPr id="2" name="TextBox 1"/>
+          <p:cNvSpPr txBox="1"/>
+          <p:nvPr/>
+        </p:nvSpPr>
+        <p:spPr>
+          <a:xfrm>
+            <a:off x="548640" y="274320"/>
+            <a:ext cx="11064240" cy="822960"/>
+          </a:xfrm>
+          <a:prstGeom prst="rect">
+            <a:avLst/>
+          </a:prstGeom>
+          <a:noFill/>
+        </p:spPr>
+        <p:txBody>
+          <a:bodyPr wrap="square">
+            <a:spAutoFit/>
+          </a:bodyPr>
+          <a:lstStyle/>
+          <a:p>
+            <a:r>
+              <a:rPr sz="3000" b="1" i="0">
+                <a:solidFill>
+                  <a:srgbClr val="2B6CB0"/>
+                </a:solidFill>
+                <a:latin typeface="Calibri"/>
+              </a:rPr>
+              <a:t>Activity 3</a:t>
+            </a:r>
+          </a:p>
+        </p:txBody>
+      </p:sp>
+      <p:sp>
+        <p:nvSpPr>
+          <p:cNvPr id="3" name="TextBox 2"/>
+          <p:cNvSpPr txBox="1"/>
+          <p:nvPr/>
+        </p:nvSpPr>
+        <p:spPr>
+          <a:xfrm>
+            <a:off x="640080" y="1280160"/>
+            <a:ext cx="10881360" cy="5120640"/>
+          </a:xfrm>
+          <a:prstGeom prst="rect">
+            <a:avLst/>
+          </a:prstGeom>
+          <a:noFill/>
+        </p:spPr>
+        <p:txBody>
+          <a:bodyPr wrap="square">
+            <a:spAutoFit/>
+          </a:bodyPr>
+          <a:lstStyle/>
+          <a:p>
+            <a:pPr/>
+            <a:r>
+              <a:rPr sz="2200" b="1">
+                <a:solidFill>
+                  <a:srgbClr val="2B6CB0"/>
+                </a:solidFill>
+                <a:latin typeface="Calibri"/>
+              </a:rPr>
+              <a:t>Sticky Notes versus the Shared Whiteboard  (10 min)</a:t>
+            </a:r>
+          </a:p>
+          <a:p>
+            <a:pPr lvl="1"/>
+            <a:r>
+              <a:rPr sz="2000" b="0">
+                <a:solidFill>
+                  <a:srgbClr val="222222"/>
+                </a:solidFill>
+                <a:latin typeface="Calibri"/>
+              </a:rPr>
+              <a:t>Write playerScore = 50 on the class whiteboard - this is the variable in memory. Board the procedure addBonus(score) with body score = score + 10.</a:t>
+            </a:r>
+          </a:p>
+          <a:p>
+            <a:pPr lvl="1"/>
+            <a:r>
+              <a:rPr sz="2000" b="0">
+                <a:solidFill>
+                  <a:srgbClr val="222222"/>
+                </a:solidFill>
+                <a:latin typeface="Calibri"/>
+              </a:rPr>
+              <a:t>Round 1, byVal: a volunteer is the subroutine. Copy the value onto a sticky note (score = 50) and hand it over: you got a COPY. They add 10 on the note only (60) and announce inside: 60. At procedure end, theatrically screw up the note and bin it. Class predicts the next print... whiteboard still says 50.</a:t>
+            </a:r>
+          </a:p>
+          <a:p>
+            <a:pPr lvl="1"/>
+            <a:r>
+              <a:rPr sz="2000" b="0">
+                <a:solidFill>
+                  <a:srgbClr val="222222"/>
+                </a:solidFill>
+                <a:latin typeface="Calibri"/>
+              </a:rPr>
+              <a:t>Round 2, byRef: hand the volunteer a note with an ARROW pointing at the whiteboard: you got the address, not a copy. They walk over and change 50 to 60 directly. Bin the arrow note - the whiteboard now says 60.</a:t>
+            </a:r>
+          </a:p>
+          <a:p>
+            <a:pPr lvl="1"/>
+            <a:r>
+              <a:rPr sz="2000" b="0">
+                <a:solidFill>
+                  <a:srgbClr val="222222"/>
+                </a:solidFill>
+                <a:latin typeface="Calibri"/>
+              </a:rPr>
+              <a:t>Everyone writes one sentence per round starting: The original was...</a:t>
+            </a:r>
+          </a:p>
+          <a:p>
+            <a:pPr lvl="1"/>
+            <a:r>
+              <a:rPr sz="2000" b="0">
+                <a:solidFill>
+                  <a:srgbClr val="222222"/>
+                </a:solidFill>
+                <a:latin typeface="Calibri"/>
+              </a:rPr>
+              <a:t>Debrief the exam-worthy phrasing: the mark is the consequence (original unchanged versus original changed), not just that a copy is made.</a:t>
+            </a:r>
+          </a:p>
+          <a:p>
+            <a:pPr/>
+            <a:r>
+              <a:rPr sz="1800" b="0">
+                <a:solidFill>
+                  <a:srgbClr val="B76E00"/>
+                </a:solidFill>
+                <a:latin typeface="Calibri"/>
+              </a:rPr>
+              <a:t>Stretch: When is byRef the better choice despite being less safe? (Large data - no expensive copy; or returning more than one change.) What about addBonus(50), passing a literal by reference? (Nothing to point at - byRef arguments must be variables.)</a:t>
+            </a:r>
+          </a:p>
+        </p:txBody>
+      </p:sp>
+    </p:spTree>
+  </p:cSld>
+  <p:clrMapOvr>
+    <a:masterClrMapping/>
+  </p:clrMapOvr>
+</p:sld>
+</file>
+
+<file path=ppt/slides/slide22.xml><?xml version="1.0" encoding="utf-8"?>
+<p:sld xmlns:a="http://schemas.openxmlformats.org/drawingml/2006/main" xmlns:p="http://schemas.openxmlformats.org/presentationml/2006/main" xmlns:r="http://schemas.openxmlformats.org/officeDocument/2006/relationships">
+  <p:cSld>
+    <p:bg>
+      <p:bgPr>
+        <a:solidFill>
+          <a:srgbClr val="FFFFFF"/>
+        </a:solidFill>
+        <a:effectLst/>
+      </p:bgPr>
+    </p:bg>
+    <p:spTree>
+      <p:nvGrpSpPr>
+        <p:cNvPr id="1" name=""/>
+        <p:cNvGrpSpPr/>
+        <p:nvPr/>
+      </p:nvGrpSpPr>
+      <p:grpSpPr/>
+      <p:sp>
+        <p:nvSpPr>
+          <p:cNvPr id="2" name="TextBox 1"/>
+          <p:cNvSpPr txBox="1"/>
+          <p:nvPr/>
+        </p:nvSpPr>
+        <p:spPr>
+          <a:xfrm>
+            <a:off x="548640" y="274320"/>
+            <a:ext cx="11064240" cy="822960"/>
+          </a:xfrm>
+          <a:prstGeom prst="rect">
+            <a:avLst/>
+          </a:prstGeom>
+          <a:noFill/>
+        </p:spPr>
+        <p:txBody>
+          <a:bodyPr wrap="square">
+            <a:spAutoFit/>
+          </a:bodyPr>
+          <a:lstStyle/>
+          <a:p>
+            <a:r>
+              <a:rPr sz="3000" b="1" i="0">
+                <a:solidFill>
+                  <a:srgbClr val="2B6CB0"/>
+                </a:solidFill>
+                <a:latin typeface="Calibri"/>
+              </a:rPr>
+              <a:t>Practice (1-4)</a:t>
+            </a:r>
+          </a:p>
+        </p:txBody>
+      </p:sp>
+      <p:sp>
+        <p:nvSpPr>
+          <p:cNvPr id="3" name="TextBox 2"/>
+          <p:cNvSpPr txBox="1"/>
+          <p:nvPr/>
+        </p:nvSpPr>
+        <p:spPr>
+          <a:xfrm>
+            <a:off x="640080" y="1280160"/>
+            <a:ext cx="10881360" cy="5120640"/>
+          </a:xfrm>
+          <a:prstGeom prst="rect">
+            <a:avLst/>
+          </a:prstGeom>
+          <a:noFill/>
+        </p:spPr>
+        <p:txBody>
+          <a:bodyPr wrap="square">
+            <a:spAutoFit/>
+          </a:bodyPr>
+          <a:lstStyle/>
+          <a:p>
+            <a:r>
+              <a:rPr sz="2000" b="1">
+                <a:solidFill>
+                  <a:srgbClr val="222222"/>
+                </a:solidFill>
+                <a:latin typeface="Calibri"/>
+              </a:rPr>
+              <a:t>1. State the difference between a function and a procedure, and give one reason a programmer would choose a function. [2]</a:t>
+            </a:r>
+          </a:p>
+          <a:p>
+            <a:r>
+              <a:rPr sz="2000" b="1">
+                <a:solidFill>
+                  <a:srgbClr val="222222"/>
+                </a:solidFill>
+                <a:latin typeface="Calibri"/>
+              </a:rPr>
+              <a:t>2. Explain why a do ... until loop is more appropriate than a while loop for validating user input. [2]</a:t>
+            </a:r>
+          </a:p>
+          <a:p>
+            <a:r>
+              <a:rPr sz="2000" b="1">
+                <a:solidFill>
+                  <a:srgbClr val="222222"/>
+                </a:solidFill>
+                <a:latin typeface="Calibri"/>
+              </a:rPr>
+              <a:t>3. State the two cases every recursive subroutine must contain, and name the error that occurs if the stopping case is never reached. [3]</a:t>
+            </a:r>
+          </a:p>
+          <a:p>
+            <a:r>
+              <a:rPr sz="2000" b="1">
+                <a:solidFill>
+                  <a:srgbClr val="222222"/>
+                </a:solidFill>
+                <a:latin typeface="Calibri"/>
+              </a:rPr>
+              <a:t>4. A function is defined: function sum(n): if n == 0 then return 0 else return n + sum(n - 1). Trace the call sum(3), showing each call and each returned value. [4]</a:t>
+            </a:r>
+          </a:p>
+        </p:txBody>
+      </p:sp>
+    </p:spTree>
+  </p:cSld>
+  <p:clrMapOvr>
+    <a:masterClrMapping/>
+  </p:clrMapOvr>
+</p:sld>
+</file>
+
+<file path=ppt/slides/slide23.xml><?xml version="1.0" encoding="utf-8"?>
+<p:sld xmlns:a="http://schemas.openxmlformats.org/drawingml/2006/main" xmlns:p="http://schemas.openxmlformats.org/presentationml/2006/main" xmlns:r="http://schemas.openxmlformats.org/officeDocument/2006/relationships">
+  <p:cSld>
+    <p:bg>
+      <p:bgPr>
+        <a:solidFill>
+          <a:srgbClr val="FFFFFF"/>
+        </a:solidFill>
+        <a:effectLst/>
+      </p:bgPr>
+    </p:bg>
+    <p:spTree>
+      <p:nvGrpSpPr>
+        <p:cNvPr id="1" name=""/>
+        <p:cNvGrpSpPr/>
+        <p:nvPr/>
+      </p:nvGrpSpPr>
+      <p:grpSpPr/>
+      <p:sp>
+        <p:nvSpPr>
+          <p:cNvPr id="2" name="TextBox 1"/>
+          <p:cNvSpPr txBox="1"/>
+          <p:nvPr/>
+        </p:nvSpPr>
+        <p:spPr>
+          <a:xfrm>
+            <a:off x="548640" y="274320"/>
+            <a:ext cx="11064240" cy="822960"/>
+          </a:xfrm>
+          <a:prstGeom prst="rect">
+            <a:avLst/>
+          </a:prstGeom>
+          <a:noFill/>
+        </p:spPr>
+        <p:txBody>
+          <a:bodyPr wrap="square">
+            <a:spAutoFit/>
+          </a:bodyPr>
+          <a:lstStyle/>
+          <a:p>
+            <a:r>
+              <a:rPr sz="3000" b="1" i="0">
+                <a:solidFill>
+                  <a:srgbClr val="2B6CB0"/>
+                </a:solidFill>
+                <a:latin typeface="Calibri"/>
+              </a:rPr>
+              <a:t>Practice — answers (1-4)</a:t>
+            </a:r>
+          </a:p>
+        </p:txBody>
+      </p:sp>
+      <p:sp>
+        <p:nvSpPr>
+          <p:cNvPr id="3" name="TextBox 2"/>
+          <p:cNvSpPr txBox="1"/>
+          <p:nvPr/>
+        </p:nvSpPr>
+        <p:spPr>
+          <a:xfrm>
+            <a:off x="640080" y="1280160"/>
+            <a:ext cx="10881360" cy="5120640"/>
+          </a:xfrm>
+          <a:prstGeom prst="rect">
+            <a:avLst/>
+          </a:prstGeom>
+          <a:noFill/>
+        </p:spPr>
+        <p:txBody>
+          <a:bodyPr wrap="square">
+            <a:spAutoFit/>
+          </a:bodyPr>
+          <a:lstStyle/>
+          <a:p>
+            <a:r>
+              <a:rPr sz="2000" b="1">
+                <a:solidFill>
+                  <a:srgbClr val="222222"/>
+                </a:solidFill>
+                <a:latin typeface="Calibri"/>
+              </a:rPr>
+              <a:t>1. State the difference between a function and a procedure, and give one reason a programmer would choose a function. [2]</a:t>
+            </a:r>
+          </a:p>
+          <a:p>
+            <a:pPr lvl="1"/>
+            <a:r>
+              <a:rPr sz="1800" i="1">
+                <a:solidFill>
+                  <a:srgbClr val="B76E00"/>
+                </a:solidFill>
+                <a:latin typeface="Calibri"/>
+              </a:rPr>
+              <a:t>Answer: A function returns a single value; a procedure returns none (1). A function is chosen when the result is needed in an expression, e.g. total = getPrice(item) * qty (1).</a:t>
+            </a:r>
+          </a:p>
+          <a:p>
+            <a:r>
+              <a:rPr sz="2000" b="1">
+                <a:solidFill>
+                  <a:srgbClr val="222222"/>
+                </a:solidFill>
+                <a:latin typeface="Calibri"/>
+              </a:rPr>
+              <a:t>2. Explain why a do ... until loop is more appropriate than a while loop for validating user input. [2]</a:t>
+            </a:r>
+          </a:p>
+          <a:p>
+            <a:pPr lvl="1"/>
+            <a:r>
+              <a:rPr sz="1800" i="1">
+                <a:solidFill>
+                  <a:srgbClr val="B76E00"/>
+                </a:solidFill>
+                <a:latin typeface="Calibri"/>
+              </a:rPr>
+              <a:t>Answer: do ... until is post-conditioned, so the body always runs at least once - the user is guaranteed to be asked (1); a while loop tests first, so it would test the variable before any input has been entered (1).</a:t>
+            </a:r>
+          </a:p>
+          <a:p>
+            <a:r>
+              <a:rPr sz="2000" b="1">
+                <a:solidFill>
+                  <a:srgbClr val="222222"/>
+                </a:solidFill>
+                <a:latin typeface="Calibri"/>
+              </a:rPr>
+              <a:t>3. State the two cases every recursive subroutine must contain, and name the error that occurs if the stopping case is never reached. [3]</a:t>
+            </a:r>
+          </a:p>
+          <a:p>
+            <a:pPr lvl="1"/>
+            <a:r>
+              <a:rPr sz="1800" i="1">
+                <a:solidFill>
+                  <a:srgbClr val="B76E00"/>
+                </a:solidFill>
+                <a:latin typeface="Calibri"/>
+              </a:rPr>
+              <a:t>Answer: A base case, which returns without a further recursive call (1), and a general (recursive) case that calls the subroutine on a smaller problem, moving toward the base case (1). If the base case is never reached, calls stack up until memory is exhausted: a stack overflow (1).</a:t>
+            </a:r>
+          </a:p>
+          <a:p>
+            <a:r>
+              <a:rPr sz="2000" b="1">
+                <a:solidFill>
+                  <a:srgbClr val="222222"/>
+                </a:solidFill>
+                <a:latin typeface="Calibri"/>
+              </a:rPr>
+              <a:t>4. A function is defined: function sum(n): if n == 0 then return 0 else return n + sum(n - 1). Trace the call sum(3), showing each call and each returned value. [4]</a:t>
+            </a:r>
+          </a:p>
+          <a:p>
+            <a:pPr lvl="1"/>
+            <a:r>
+              <a:rPr sz="1800" i="1">
+                <a:solidFill>
+                  <a:srgbClr val="B76E00"/>
+                </a:solidFill>
+                <a:latin typeface="Calibri"/>
+              </a:rPr>
+              <a:t>Answer: sum(3) calls sum(2), which calls sum(1), which calls sum(0) (1). sum(0) hits the base case and returns 0 (1). Returns unwind in LIFO order: sum(1) returns 1 + 0 = 1, sum(2) returns 2 + 1 = 3 (1), and sum(3) returns 3 + 3 = 6, the final answer (1).</a:t>
+            </a:r>
+          </a:p>
+        </p:txBody>
+      </p:sp>
+    </p:spTree>
+  </p:cSld>
+  <p:clrMapOvr>
+    <a:masterClrMapping/>
+  </p:clrMapOvr>
+</p:sld>
+</file>
+
+<file path=ppt/slides/slide24.xml><?xml version="1.0" encoding="utf-8"?>
+<p:sld xmlns:a="http://schemas.openxmlformats.org/drawingml/2006/main" xmlns:p="http://schemas.openxmlformats.org/presentationml/2006/main" xmlns:r="http://schemas.openxmlformats.org/officeDocument/2006/relationships">
+  <p:cSld>
+    <p:bg>
+      <p:bgPr>
+        <a:solidFill>
+          <a:srgbClr val="FFFFFF"/>
+        </a:solidFill>
+        <a:effectLst/>
+      </p:bgPr>
+    </p:bg>
+    <p:spTree>
+      <p:nvGrpSpPr>
+        <p:cNvPr id="1" name=""/>
+        <p:cNvGrpSpPr/>
+        <p:nvPr/>
+      </p:nvGrpSpPr>
+      <p:grpSpPr/>
+      <p:sp>
+        <p:nvSpPr>
+          <p:cNvPr id="2" name="TextBox 1"/>
+          <p:cNvSpPr txBox="1"/>
+          <p:nvPr/>
+        </p:nvSpPr>
+        <p:spPr>
+          <a:xfrm>
+            <a:off x="548640" y="274320"/>
+            <a:ext cx="11064240" cy="822960"/>
+          </a:xfrm>
+          <a:prstGeom prst="rect">
+            <a:avLst/>
+          </a:prstGeom>
+          <a:noFill/>
+        </p:spPr>
+        <p:txBody>
+          <a:bodyPr wrap="square">
+            <a:spAutoFit/>
+          </a:bodyPr>
+          <a:lstStyle/>
+          <a:p>
+            <a:r>
+              <a:rPr sz="3000" b="1" i="0">
+                <a:solidFill>
+                  <a:srgbClr val="2B6CB0"/>
+                </a:solidFill>
+                <a:latin typeface="Calibri"/>
+              </a:rPr>
+              <a:t>Practice (5-8)</a:t>
+            </a:r>
+          </a:p>
+        </p:txBody>
+      </p:sp>
+      <p:sp>
+        <p:nvSpPr>
+          <p:cNvPr id="3" name="TextBox 2"/>
+          <p:cNvSpPr txBox="1"/>
+          <p:nvPr/>
+        </p:nvSpPr>
+        <p:spPr>
+          <a:xfrm>
+            <a:off x="640080" y="1280160"/>
+            <a:ext cx="10881360" cy="5120640"/>
+          </a:xfrm>
+          <a:prstGeom prst="rect">
+            <a:avLst/>
+          </a:prstGeom>
+          <a:noFill/>
+        </p:spPr>
+        <p:txBody>
+          <a:bodyPr wrap="square">
+            <a:spAutoFit/>
+          </a:bodyPr>
+          <a:lstStyle/>
+          <a:p>
+            <a:r>
+              <a:rPr sz="2000" b="1">
+                <a:solidFill>
+                  <a:srgbClr val="222222"/>
+                </a:solidFill>
+                <a:latin typeface="Calibri"/>
+              </a:rPr>
+              <a:t>1. A global variable count = 20 exists. A procedure assigns count = 7 (without a global declaration) and prints it; afterwards the main program prints count. State both outputs and explain the result. [3]</a:t>
+            </a:r>
+          </a:p>
+          <a:p>
+            <a:r>
+              <a:rPr sz="2000" b="1">
+                <a:solidFill>
+                  <a:srgbClr val="222222"/>
+                </a:solidFill>
+                <a:latin typeface="Calibri"/>
+              </a:rPr>
+              <a:t>2. Given procedure double(n:byRef) with body n = n * 2, and x = 8: state the value of x after double(x), and after the same call if the parameter were n:byVal. [2]</a:t>
+            </a:r>
+          </a:p>
+          <a:p>
+            <a:r>
+              <a:rPr sz="2000" b="1">
+                <a:solidFill>
+                  <a:srgbClr val="222222"/>
+                </a:solidFill>
+                <a:latin typeface="Calibri"/>
+              </a:rPr>
+              <a:t>3. Describe two ways writing a program as a set of subroutines (modularity) benefits a development team. [2]</a:t>
+            </a:r>
+          </a:p>
+          <a:p>
+            <a:r>
+              <a:rPr sz="2000" b="1">
+                <a:solidFill>
+                  <a:srgbClr val="222222"/>
+                </a:solidFill>
+                <a:latin typeface="Calibri"/>
+              </a:rPr>
+              <a:t>4. Describe two features of an IDE that help a programmer locate a run-time logic error. [2]</a:t>
+            </a:r>
+          </a:p>
+        </p:txBody>
+      </p:sp>
+    </p:spTree>
+  </p:cSld>
+  <p:clrMapOvr>
+    <a:masterClrMapping/>
+  </p:clrMapOvr>
+</p:sld>
+</file>
+
+<file path=ppt/slides/slide25.xml><?xml version="1.0" encoding="utf-8"?>
+<p:sld xmlns:a="http://schemas.openxmlformats.org/drawingml/2006/main" xmlns:p="http://schemas.openxmlformats.org/presentationml/2006/main" xmlns:r="http://schemas.openxmlformats.org/officeDocument/2006/relationships">
+  <p:cSld>
+    <p:bg>
+      <p:bgPr>
+        <a:solidFill>
+          <a:srgbClr val="FFFFFF"/>
+        </a:solidFill>
+        <a:effectLst/>
+      </p:bgPr>
+    </p:bg>
+    <p:spTree>
+      <p:nvGrpSpPr>
+        <p:cNvPr id="1" name=""/>
+        <p:cNvGrpSpPr/>
+        <p:nvPr/>
+      </p:nvGrpSpPr>
+      <p:grpSpPr/>
+      <p:sp>
+        <p:nvSpPr>
+          <p:cNvPr id="2" name="TextBox 1"/>
+          <p:cNvSpPr txBox="1"/>
+          <p:nvPr/>
+        </p:nvSpPr>
+        <p:spPr>
+          <a:xfrm>
+            <a:off x="548640" y="274320"/>
+            <a:ext cx="11064240" cy="822960"/>
+          </a:xfrm>
+          <a:prstGeom prst="rect">
+            <a:avLst/>
+          </a:prstGeom>
+          <a:noFill/>
+        </p:spPr>
+        <p:txBody>
+          <a:bodyPr wrap="square">
+            <a:spAutoFit/>
+          </a:bodyPr>
+          <a:lstStyle/>
+          <a:p>
+            <a:r>
+              <a:rPr sz="3000" b="1" i="0">
+                <a:solidFill>
+                  <a:srgbClr val="2B6CB0"/>
+                </a:solidFill>
+                <a:latin typeface="Calibri"/>
+              </a:rPr>
+              <a:t>Practice — answers (5-8)</a:t>
+            </a:r>
+          </a:p>
+        </p:txBody>
+      </p:sp>
+      <p:sp>
+        <p:nvSpPr>
+          <p:cNvPr id="3" name="TextBox 2"/>
+          <p:cNvSpPr txBox="1"/>
+          <p:nvPr/>
+        </p:nvSpPr>
+        <p:spPr>
+          <a:xfrm>
+            <a:off x="640080" y="1280160"/>
+            <a:ext cx="10881360" cy="5120640"/>
+          </a:xfrm>
+          <a:prstGeom prst="rect">
+            <a:avLst/>
+          </a:prstGeom>
+          <a:noFill/>
+        </p:spPr>
+        <p:txBody>
+          <a:bodyPr wrap="square">
+            <a:spAutoFit/>
+          </a:bodyPr>
+          <a:lstStyle/>
+          <a:p>
+            <a:r>
+              <a:rPr sz="2000" b="1">
+                <a:solidFill>
+                  <a:srgbClr val="222222"/>
+                </a:solidFill>
+                <a:latin typeface="Calibri"/>
+              </a:rPr>
+              <a:t>1. A global variable count = 20 exists. A procedure assigns count = 7 (without a global declaration) and prints it; afterwards the main program prints count. State both outputs and explain the result. [3]</a:t>
+            </a:r>
+          </a:p>
+          <a:p>
+            <a:pPr lvl="1"/>
+            <a:r>
+              <a:rPr sz="1800" i="1">
+                <a:solidFill>
+                  <a:srgbClr val="B76E00"/>
+                </a:solidFill>
+                <a:latin typeface="Calibri"/>
+              </a:rPr>
+              <a:t>Answer: The procedure prints 7 (1); the main program prints 20 (1). The assignment created a local variable that shadows the global inside the procedure, so the global was never changed (1).</a:t>
+            </a:r>
+          </a:p>
+          <a:p>
+            <a:r>
+              <a:rPr sz="2000" b="1">
+                <a:solidFill>
+                  <a:srgbClr val="222222"/>
+                </a:solidFill>
+                <a:latin typeface="Calibri"/>
+              </a:rPr>
+              <a:t>2. Given procedure double(n:byRef) with body n = n * 2, and x = 8: state the value of x after double(x), and after the same call if the parameter were n:byVal. [2]</a:t>
+            </a:r>
+          </a:p>
+          <a:p>
+            <a:pPr lvl="1"/>
+            <a:r>
+              <a:rPr sz="1800" i="1">
+                <a:solidFill>
+                  <a:srgbClr val="B76E00"/>
+                </a:solidFill>
+                <a:latin typeface="Calibri"/>
+              </a:rPr>
+              <a:t>Answer: byRef: x = 16, because the address of x is passed and the original is updated (1). byVal: x = 8, because only a copy is doubled and then discarded (1).</a:t>
+            </a:r>
+          </a:p>
+          <a:p>
+            <a:r>
+              <a:rPr sz="2000" b="1">
+                <a:solidFill>
+                  <a:srgbClr val="222222"/>
+                </a:solidFill>
+                <a:latin typeface="Calibri"/>
+              </a:rPr>
+              <a:t>3. Describe two ways writing a program as a set of subroutines (modularity) benefits a development team. [2]</a:t>
+            </a:r>
+          </a:p>
+          <a:p>
+            <a:pPr lvl="1"/>
+            <a:r>
+              <a:rPr sz="1800" i="1">
+                <a:solidFill>
+                  <a:srgbClr val="B76E00"/>
+                </a:solidFill>
+                <a:latin typeface="Calibri"/>
+              </a:rPr>
+              <a:t>Answer: Any two of: modules can be written and tested independently, making errors easier to isolate (1); modules can be shared between team members and developed in parallel (1); tested modules can be reused in other programs, saving time (1).</a:t>
+            </a:r>
+          </a:p>
+          <a:p>
+            <a:r>
+              <a:rPr sz="2000" b="1">
+                <a:solidFill>
+                  <a:srgbClr val="222222"/>
+                </a:solidFill>
+                <a:latin typeface="Calibri"/>
+              </a:rPr>
+              <a:t>4. Describe two features of an IDE that help a programmer locate a run-time logic error. [2]</a:t>
+            </a:r>
+          </a:p>
+          <a:p>
+            <a:pPr lvl="1"/>
+            <a:r>
+              <a:rPr sz="1800" i="1">
+                <a:solidFill>
+                  <a:srgbClr val="B76E00"/>
+                </a:solidFill>
+                <a:latin typeface="Calibri"/>
+              </a:rPr>
+              <a:t>Answer: Breakpoints pause the program at a chosen line so the state can be inspected (1); stepping plus a variable watch runs one line at a time while showing how variable values change, revealing where they go wrong (1).</a:t>
+            </a:r>
+          </a:p>
+        </p:txBody>
+      </p:sp>
+    </p:spTree>
+  </p:cSld>
+  <p:clrMapOvr>
+    <a:masterClrMapping/>
+  </p:clrMapOvr>
+</p:sld>
+</file>
+
+<file path=ppt/slides/slide26.xml><?xml version="1.0" encoding="utf-8"?>
+<p:sld xmlns:a="http://schemas.openxmlformats.org/drawingml/2006/main" xmlns:p="http://schemas.openxmlformats.org/presentationml/2006/main" xmlns:r="http://schemas.openxmlformats.org/officeDocument/2006/relationships">
+  <p:cSld>
+    <p:bg>
+      <p:bgPr>
+        <a:solidFill>
+          <a:srgbClr val="FFFFFF"/>
+        </a:solidFill>
+        <a:effectLst/>
+      </p:bgPr>
+    </p:bg>
+    <p:spTree>
+      <p:nvGrpSpPr>
+        <p:cNvPr id="1" name=""/>
+        <p:cNvGrpSpPr/>
+        <p:nvPr/>
+      </p:nvGrpSpPr>
+      <p:grpSpPr/>
+      <p:sp>
+        <p:nvSpPr>
+          <p:cNvPr id="2" name="TextBox 1"/>
+          <p:cNvSpPr txBox="1"/>
+          <p:nvPr/>
+        </p:nvSpPr>
+        <p:spPr>
+          <a:xfrm>
+            <a:off x="548640" y="274320"/>
+            <a:ext cx="11064240" cy="822960"/>
+          </a:xfrm>
+          <a:prstGeom prst="rect">
+            <a:avLst/>
+          </a:prstGeom>
+          <a:noFill/>
+        </p:spPr>
+        <p:txBody>
+          <a:bodyPr wrap="square">
+            <a:spAutoFit/>
+          </a:bodyPr>
+          <a:lstStyle/>
+          <a:p>
+            <a:r>
+              <a:rPr sz="3000" b="1" i="0">
+                <a:solidFill>
+                  <a:srgbClr val="2B6CB0"/>
+                </a:solidFill>
+                <a:latin typeface="Calibri"/>
+              </a:rPr>
+              <a:t>Common misconceptions</a:t>
+            </a:r>
+          </a:p>
+        </p:txBody>
+      </p:sp>
+      <p:sp>
+        <p:nvSpPr>
+          <p:cNvPr id="3" name="TextBox 2"/>
+          <p:cNvSpPr txBox="1"/>
+          <p:nvPr/>
+        </p:nvSpPr>
+        <p:spPr>
+          <a:xfrm>
+            <a:off x="640080" y="1280160"/>
+            <a:ext cx="10881360" cy="5120640"/>
+          </a:xfrm>
+          <a:prstGeom prst="rect">
+            <a:avLst/>
+          </a:prstGeom>
+          <a:noFill/>
+        </p:spPr>
+        <p:txBody>
+          <a:bodyPr wrap="square">
+            <a:spAutoFit/>
+          </a:bodyPr>
+          <a:lstStyle/>
+          <a:p>
+            <a:pPr/>
+            <a:r>
+              <a:rPr sz="2000" b="0">
+                <a:solidFill>
+                  <a:srgbClr val="222222"/>
+                </a:solidFill>
+                <a:latin typeface="Calibri"/>
+              </a:rPr>
+              <a:t>✗ Students often assume a while loop always runs at least once; it is pre-conditioned and can run zero times - only do ... until guarantees one pass.</a:t>
+            </a:r>
+          </a:p>
+          <a:p>
+            <a:pPr/>
+            <a:r>
+              <a:rPr sz="2000" b="0">
+                <a:solidFill>
+                  <a:srgbClr val="222222"/>
+                </a:solidFill>
+                <a:latin typeface="Calibri"/>
+              </a:rPr>
+              <a:t>✗ Students often think recursion is free elegance; every call pushes a stack frame, so it costs memory and call overhead, and can overflow where iteration cannot.</a:t>
+            </a:r>
+          </a:p>
+          <a:p>
+            <a:pPr/>
+            <a:r>
+              <a:rPr sz="2000" b="0">
+                <a:solidFill>
+                  <a:srgbClr val="222222"/>
+                </a:solidFill>
+                <a:latin typeface="Calibri"/>
+              </a:rPr>
+              <a:t>✗ Students often say byRef passes the variable's name or value; it passes the memory ADDRESS - and the mark comes from the consequence: the original can be changed.</a:t>
+            </a:r>
+          </a:p>
+          <a:p>
+            <a:pPr/>
+            <a:r>
+              <a:rPr sz="2000" b="0">
+                <a:solidFill>
+                  <a:srgbClr val="222222"/>
+                </a:solidFill>
+                <a:latin typeface="Calibri"/>
+              </a:rPr>
+              <a:t>✗ Students often believe assigning to a name inside a subroutine changes the same-named global; without a global declaration it creates a shadowing local instead.</a:t>
+            </a:r>
+          </a:p>
+          <a:p>
+            <a:pPr/>
+            <a:r>
+              <a:rPr sz="2000" b="0">
+                <a:solidFill>
+                  <a:srgbClr val="222222"/>
+                </a:solidFill>
+                <a:latin typeface="Calibri"/>
+              </a:rPr>
+              <a:t>✗ Students often use function and procedure interchangeably; the defining difference is that a function returns a value and a procedure does not.</a:t>
+            </a:r>
+          </a:p>
+        </p:txBody>
+      </p:sp>
+    </p:spTree>
+  </p:cSld>
+  <p:clrMapOvr>
+    <a:masterClrMapping/>
+  </p:clrMapOvr>
+</p:sld>
+</file>
+
+<file path=ppt/slides/slide27.xml><?xml version="1.0" encoding="utf-8"?>
+<p:sld xmlns:a="http://schemas.openxmlformats.org/drawingml/2006/main" xmlns:p="http://schemas.openxmlformats.org/presentationml/2006/main" xmlns:r="http://schemas.openxmlformats.org/officeDocument/2006/relationships">
+  <p:cSld>
+    <p:bg>
+      <p:bgPr>
+        <a:solidFill>
+          <a:srgbClr val="FFFFFF"/>
+        </a:solidFill>
+        <a:effectLst/>
+      </p:bgPr>
+    </p:bg>
+    <p:spTree>
+      <p:nvGrpSpPr>
+        <p:cNvPr id="1" name=""/>
+        <p:cNvGrpSpPr/>
+        <p:nvPr/>
+      </p:nvGrpSpPr>
+      <p:grpSpPr/>
+      <p:sp>
+        <p:nvSpPr>
+          <p:cNvPr id="2" name="TextBox 1"/>
+          <p:cNvSpPr txBox="1"/>
+          <p:nvPr/>
+        </p:nvSpPr>
+        <p:spPr>
+          <a:xfrm>
+            <a:off x="548640" y="274320"/>
+            <a:ext cx="11064240" cy="822960"/>
+          </a:xfrm>
+          <a:prstGeom prst="rect">
+            <a:avLst/>
+          </a:prstGeom>
+          <a:noFill/>
+        </p:spPr>
+        <p:txBody>
+          <a:bodyPr wrap="square">
+            <a:spAutoFit/>
+          </a:bodyPr>
+          <a:lstStyle/>
+          <a:p>
+            <a:r>
+              <a:rPr sz="3000" b="1" i="0">
+                <a:solidFill>
+                  <a:srgbClr val="2B6CB0"/>
+                </a:solidFill>
+                <a:latin typeface="Calibri"/>
+              </a:rPr>
+              <a:t>How the exam asks this</a:t>
+            </a:r>
+          </a:p>
+        </p:txBody>
+      </p:sp>
+      <p:sp>
+        <p:nvSpPr>
+          <p:cNvPr id="3" name="TextBox 2"/>
+          <p:cNvSpPr txBox="1"/>
+          <p:nvPr/>
+        </p:nvSpPr>
+        <p:spPr>
+          <a:xfrm>
+            <a:off x="640080" y="1280160"/>
+            <a:ext cx="10881360" cy="5120640"/>
+          </a:xfrm>
+          <a:prstGeom prst="rect">
+            <a:avLst/>
+          </a:prstGeom>
+          <a:noFill/>
+        </p:spPr>
+        <p:txBody>
+          <a:bodyPr wrap="square">
+            <a:spAutoFit/>
+          </a:bodyPr>
+          <a:lstStyle/>
+          <a:p>
+            <a:pPr/>
+            <a:r>
+              <a:rPr sz="2000" b="0">
+                <a:solidFill>
+                  <a:srgbClr val="222222"/>
+                </a:solidFill>
+                <a:latin typeface="Calibri"/>
+              </a:rPr>
+              <a:t>Command words: write and complete for ERL code (4-8 marks), trace and state the output for loops and recursion (3-6 marks), explain and compare for recursion versus iteration and byVal versus byRef (2-4 marks).</a:t>
+            </a:r>
+          </a:p>
+          <a:p>
+            <a:pPr/>
+            <a:r>
+              <a:rPr sz="2000" b="0">
+                <a:solidFill>
+                  <a:srgbClr val="222222"/>
+                </a:solidFill>
+                <a:latin typeface="Calibri"/>
+              </a:rPr>
+              <a:t>Recursion traces are a 4-6 mark staple: marks sit in the frames pushed, the base case identified, and the returns combined in LIFO order.</a:t>
+            </a:r>
+          </a:p>
+          <a:p>
+            <a:pPr/>
+            <a:r>
+              <a:rPr sz="2000" b="0">
+                <a:solidFill>
+                  <a:srgbClr val="222222"/>
+                </a:solidFill>
+                <a:latin typeface="Calibri"/>
+              </a:rPr>
+              <a:t>Code-writing answers must be OCR Exam Reference Language: endif, endwhile, next i, endfunction all matter for full marks.</a:t>
+            </a:r>
+          </a:p>
+          <a:p>
+            <a:pPr/>
+            <a:r>
+              <a:rPr sz="2000" b="0">
+                <a:solidFill>
+                  <a:srgbClr val="222222"/>
+                </a:solidFill>
+                <a:latin typeface="Calibri"/>
+              </a:rPr>
+              <a:t>Example stem: 'A recursive function mystery(n) is shown. State the value returned by mystery(4) and explain the purpose of the line if n == 0 then return 0.' [4]</a:t>
+            </a:r>
+          </a:p>
+        </p:txBody>
+      </p:sp>
+    </p:spTree>
+  </p:cSld>
+  <p:clrMapOvr>
+    <a:masterClrMapping/>
+  </p:clrMapOvr>
+</p:sld>
+</file>
+
+<file path=ppt/slides/slide28.xml><?xml version="1.0" encoding="utf-8"?>
+<p:sld xmlns:a="http://schemas.openxmlformats.org/drawingml/2006/main" xmlns:p="http://schemas.openxmlformats.org/presentationml/2006/main" xmlns:r="http://schemas.openxmlformats.org/officeDocument/2006/relationships">
+  <p:cSld>
+    <p:bg>
+      <p:bgPr>
+        <a:solidFill>
+          <a:srgbClr val="FFFFFF"/>
+        </a:solidFill>
+        <a:effectLst/>
+      </p:bgPr>
+    </p:bg>
+    <p:spTree>
+      <p:nvGrpSpPr>
+        <p:cNvPr id="1" name=""/>
+        <p:cNvGrpSpPr/>
+        <p:nvPr/>
+      </p:nvGrpSpPr>
+      <p:grpSpPr/>
+      <p:sp>
+        <p:nvSpPr>
+          <p:cNvPr id="2" name="TextBox 1"/>
+          <p:cNvSpPr txBox="1"/>
+          <p:nvPr/>
+        </p:nvSpPr>
+        <p:spPr>
+          <a:xfrm>
+            <a:off x="548640" y="274320"/>
+            <a:ext cx="11064240" cy="822960"/>
+          </a:xfrm>
+          <a:prstGeom prst="rect">
+            <a:avLst/>
+          </a:prstGeom>
+          <a:noFill/>
+        </p:spPr>
+        <p:txBody>
+          <a:bodyPr wrap="square">
+            <a:spAutoFit/>
+          </a:bodyPr>
+          <a:lstStyle/>
+          <a:p>
+            <a:r>
+              <a:rPr sz="3000" b="1" i="0">
+                <a:solidFill>
+                  <a:srgbClr val="2B6CB0"/>
+                </a:solidFill>
+                <a:latin typeface="Calibri"/>
+              </a:rPr>
+              <a:t>Your turn</a:t>
+            </a:r>
+          </a:p>
+        </p:txBody>
+      </p:sp>
+      <p:sp>
+        <p:nvSpPr>
+          <p:cNvPr id="3" name="TextBox 2"/>
+          <p:cNvSpPr txBox="1"/>
+          <p:nvPr/>
+        </p:nvSpPr>
+        <p:spPr>
+          <a:xfrm>
+            <a:off x="640080" y="1280160"/>
+            <a:ext cx="10881360" cy="5120640"/>
+          </a:xfrm>
+          <a:prstGeom prst="rect">
+            <a:avLst/>
+          </a:prstGeom>
+          <a:noFill/>
+        </p:spPr>
+        <p:txBody>
+          <a:bodyPr wrap="square">
+            <a:spAutoFit/>
+          </a:bodyPr>
+          <a:lstStyle/>
+          <a:p>
+            <a:pPr/>
+            <a:r>
+              <a:rPr sz="2400" b="1">
+                <a:solidFill>
+                  <a:srgbClr val="2B6CB0"/>
+                </a:solidFill>
+                <a:latin typeface="Calibri"/>
+              </a:rPr>
+              <a:t>Task</a:t>
+            </a:r>
+          </a:p>
+          <a:p>
+            <a:pPr lvl="1"/>
+            <a:r>
+              <a:rPr sz="2200" b="0">
+                <a:solidFill>
+                  <a:srgbClr val="222222"/>
+                </a:solidFill>
+                <a:latin typeface="Calibri"/>
+              </a:rPr>
+              <a:t>Write an OCR ERL program that uses a do ... until loop to keep asking for a test mark until it is between 0 and 100 inclusive, printing a warning after each invalid attempt. Then rewrite it with a while loop (you will need a priming input before the loop), and write one sentence stating the behavioural difference between your two versions.</a:t>
+            </a:r>
+          </a:p>
+          <a:p>
+            <a:r>
+              <a:rPr sz="2400" b="1">
+                <a:solidFill>
+                  <a:srgbClr val="B76E00"/>
+                </a:solidFill>
+                <a:latin typeface="Calibri"/>
+              </a:rPr>
+              <a:t>Challenge / stretch</a:t>
+            </a:r>
+          </a:p>
+          <a:p>
+            <a:pPr lvl="1"/>
+            <a:r>
+              <a:rPr sz="2200" b="0">
+                <a:solidFill>
+                  <a:srgbClr val="222222"/>
+                </a:solidFill>
+                <a:latin typeface="Calibri"/>
+              </a:rPr>
+              <a:t>Write a recursive ERL function power(base, index) that returns base to the power index (base case: index == 0 returns 1; general case: return base * power(base, index - 1)). Trace power(2, 4) showing all five stack frames and the returned values 1, 2, 4, 8, 16. Then rewrite it with a for loop and give one advantage of each version.</a:t>
+            </a:r>
+          </a:p>
+        </p:txBody>
+      </p:sp>
+    </p:spTree>
+  </p:cSld>
+  <p:clrMapOvr>
+    <a:masterClrMapping/>
+  </p:clrMapOvr>
+</p:sld>
+</file>
+
+<file path=ppt/slides/slide29.xml><?xml version="1.0" encoding="utf-8"?>
+<p:sld xmlns:a="http://schemas.openxmlformats.org/drawingml/2006/main" xmlns:p="http://schemas.openxmlformats.org/presentationml/2006/main" xmlns:r="http://schemas.openxmlformats.org/officeDocument/2006/relationships">
+  <p:cSld>
+    <p:bg>
+      <p:bgPr>
+        <a:solidFill>
+          <a:srgbClr val="FFFFFF"/>
+        </a:solidFill>
+        <a:effectLst/>
+      </p:bgPr>
+    </p:bg>
+    <p:spTree>
+      <p:nvGrpSpPr>
+        <p:cNvPr id="1" name=""/>
+        <p:cNvGrpSpPr/>
+        <p:nvPr/>
+      </p:nvGrpSpPr>
+      <p:grpSpPr/>
+      <p:sp>
+        <p:nvSpPr>
+          <p:cNvPr id="2" name="TextBox 1"/>
+          <p:cNvSpPr txBox="1"/>
+          <p:nvPr/>
+        </p:nvSpPr>
+        <p:spPr>
+          <a:xfrm>
+            <a:off x="548640" y="274320"/>
+            <a:ext cx="11064240" cy="822960"/>
+          </a:xfrm>
+          <a:prstGeom prst="rect">
+            <a:avLst/>
+          </a:prstGeom>
+          <a:noFill/>
+        </p:spPr>
+        <p:txBody>
+          <a:bodyPr wrap="square">
+            <a:spAutoFit/>
+          </a:bodyPr>
+          <a:lstStyle/>
+          <a:p>
+            <a:r>
+              <a:rPr sz="3000" b="1" i="0">
+                <a:solidFill>
+                  <a:srgbClr val="2B6CB0"/>
+                </a:solidFill>
+                <a:latin typeface="Calibri"/>
+              </a:rPr>
+              <a:t>Exit ticket</a:t>
+            </a:r>
+          </a:p>
+        </p:txBody>
+      </p:sp>
+      <p:sp>
+        <p:nvSpPr>
+          <p:cNvPr id="3" name="TextBox 2"/>
+          <p:cNvSpPr txBox="1"/>
+          <p:nvPr/>
+        </p:nvSpPr>
+        <p:spPr>
+          <a:xfrm>
+            <a:off x="640080" y="1280160"/>
+            <a:ext cx="10881360" cy="5120640"/>
+          </a:xfrm>
+          <a:prstGeom prst="rect">
+            <a:avLst/>
+          </a:prstGeom>
+          <a:noFill/>
+        </p:spPr>
+        <p:txBody>
+          <a:bodyPr wrap="square">
+            <a:spAutoFit/>
+          </a:bodyPr>
+          <a:lstStyle/>
+          <a:p>
+            <a:r>
+              <a:rPr sz="2200" b="1">
+                <a:solidFill>
+                  <a:srgbClr val="222222"/>
+                </a:solidFill>
+                <a:latin typeface="Calibri"/>
+              </a:rPr>
+              <a:t>1. Name the two cases every recursive subroutine needs, and what each one does.</a:t>
+            </a:r>
+          </a:p>
+          <a:p>
+            <a:r>
+              <a:rPr sz="2200" b="1">
+                <a:solidFill>
+                  <a:srgbClr val="222222"/>
+                </a:solidFill>
+                <a:latin typeface="Calibri"/>
+              </a:rPr>
+              <a:t>2. One sentence each: what is the consequence of passing byVal, and of passing byRef?</a:t>
+            </a:r>
+          </a:p>
+          <a:p>
+            <a:r>
+              <a:rPr sz="2200" b="1">
+                <a:solidFill>
+                  <a:srgbClr val="222222"/>
+                </a:solidFill>
+                <a:latin typeface="Calibri"/>
+              </a:rPr>
+              <a:t>3. A global total = 10; a procedure runs total = 5 then print(total); afterwards the main program runs print(total). What prints, and why?</a:t>
             </a:r>
           </a:p>
         </p:txBody>
@@ -4092,7 +6576,7 @@
                 </a:solidFill>
                 <a:latin typeface="Calibri"/>
               </a:rPr>
-              <a:t>1. Which loop type tests its condition at the end and so always runs at least once?</a:t>
+              <a:t>1. 2.1.3: what is decomposition, and why does it help a team build a large program?</a:t>
             </a:r>
           </a:p>
           <a:p>
@@ -4103,7 +6587,7 @@
                 </a:solidFill>
                 <a:latin typeface="Calibri"/>
               </a:rPr>
-              <a:t>2. What is the single defining difference between a function and a procedure?</a:t>
+              <a:t>2. 2.1.3: what does it mean to identify the order of steps when thinking procedurally?</a:t>
             </a:r>
           </a:p>
           <a:p>
@@ -4114,7 +6598,7 @@
                 </a:solidFill>
                 <a:latin typeface="Calibri"/>
               </a:rPr>
-              <a:t>3. When an argument is passed by reference, what is actually passed and what is the consequence?</a:t>
+              <a:t>3. 2.1.4: what is a decision point, and which programming construct implements one?</a:t>
             </a:r>
           </a:p>
           <a:p>
@@ -4125,7 +6609,7 @@
                 </a:solidFill>
                 <a:latin typeface="Calibri"/>
               </a:rPr>
-              <a:t>4. State the difference between the MAR and the MDR (interleaves 1.1.1 processor registers).</a:t>
+              <a:t>4. 1.2.4: state the difference between a class and an object.</a:t>
             </a:r>
           </a:p>
           <a:p>
@@ -4136,7 +6620,159 @@
                 </a:solidFill>
                 <a:latin typeface="Calibri"/>
               </a:rPr>
-              <a:t>5. What does a stack do on a push, and in what order are items removed (interleaves 1.4.2 data structures)?</a:t>
+              <a:t>5. 1.2.4: what is inheritance in object-oriented programming?</a:t>
+            </a:r>
+          </a:p>
+        </p:txBody>
+      </p:sp>
+    </p:spTree>
+  </p:cSld>
+  <p:clrMapOvr>
+    <a:masterClrMapping/>
+  </p:clrMapOvr>
+</p:sld>
+</file>
+
+<file path=ppt/slides/slide30.xml><?xml version="1.0" encoding="utf-8"?>
+<p:sld xmlns:a="http://schemas.openxmlformats.org/drawingml/2006/main" xmlns:p="http://schemas.openxmlformats.org/presentationml/2006/main" xmlns:r="http://schemas.openxmlformats.org/officeDocument/2006/relationships">
+  <p:cSld>
+    <p:bg>
+      <p:bgPr>
+        <a:solidFill>
+          <a:srgbClr val="FFFFFF"/>
+        </a:solidFill>
+        <a:effectLst/>
+      </p:bgPr>
+    </p:bg>
+    <p:spTree>
+      <p:nvGrpSpPr>
+        <p:cNvPr id="1" name=""/>
+        <p:cNvGrpSpPr/>
+        <p:nvPr/>
+      </p:nvGrpSpPr>
+      <p:grpSpPr/>
+      <p:sp>
+        <p:nvSpPr>
+          <p:cNvPr id="2" name="TextBox 1"/>
+          <p:cNvSpPr txBox="1"/>
+          <p:nvPr/>
+        </p:nvSpPr>
+        <p:spPr>
+          <a:xfrm>
+            <a:off x="548640" y="274320"/>
+            <a:ext cx="11064240" cy="822960"/>
+          </a:xfrm>
+          <a:prstGeom prst="rect">
+            <a:avLst/>
+          </a:prstGeom>
+          <a:noFill/>
+        </p:spPr>
+        <p:txBody>
+          <a:bodyPr wrap="square">
+            <a:spAutoFit/>
+          </a:bodyPr>
+          <a:lstStyle/>
+          <a:p>
+            <a:r>
+              <a:rPr sz="3000" b="1" i="0">
+                <a:solidFill>
+                  <a:srgbClr val="2B6CB0"/>
+                </a:solidFill>
+                <a:latin typeface="Calibri"/>
+              </a:rPr>
+              <a:t>Exit ticket — answers</a:t>
+            </a:r>
+          </a:p>
+        </p:txBody>
+      </p:sp>
+      <p:sp>
+        <p:nvSpPr>
+          <p:cNvPr id="3" name="TextBox 2"/>
+          <p:cNvSpPr txBox="1"/>
+          <p:nvPr/>
+        </p:nvSpPr>
+        <p:spPr>
+          <a:xfrm>
+            <a:off x="640080" y="1280160"/>
+            <a:ext cx="10881360" cy="5120640"/>
+          </a:xfrm>
+          <a:prstGeom prst="rect">
+            <a:avLst/>
+          </a:prstGeom>
+          <a:noFill/>
+        </p:spPr>
+        <p:txBody>
+          <a:bodyPr wrap="square">
+            <a:spAutoFit/>
+          </a:bodyPr>
+          <a:lstStyle/>
+          <a:p>
+            <a:r>
+              <a:rPr sz="2200" b="1">
+                <a:solidFill>
+                  <a:srgbClr val="222222"/>
+                </a:solidFill>
+                <a:latin typeface="Calibri"/>
+              </a:rPr>
+              <a:t>1. Name the two cases every recursive subroutine needs, and what each one does.</a:t>
+            </a:r>
+          </a:p>
+          <a:p>
+            <a:pPr lvl="1"/>
+            <a:r>
+              <a:rPr sz="1800" i="1">
+                <a:solidFill>
+                  <a:srgbClr val="B76E00"/>
+                </a:solidFill>
+                <a:latin typeface="Calibri"/>
+              </a:rPr>
+              <a:t>Answer: A base case, which returns without calling itself, stopping the recursion; and a general case, which calls itself on a smaller problem moving toward the base case.</a:t>
+            </a:r>
+          </a:p>
+          <a:p>
+            <a:r>
+              <a:rPr sz="2200" b="1">
+                <a:solidFill>
+                  <a:srgbClr val="222222"/>
+                </a:solidFill>
+                <a:latin typeface="Calibri"/>
+              </a:rPr>
+              <a:t>2. One sentence each: what is the consequence of passing byVal, and of passing byRef?</a:t>
+            </a:r>
+          </a:p>
+          <a:p>
+            <a:pPr lvl="1"/>
+            <a:r>
+              <a:rPr sz="1800" i="1">
+                <a:solidFill>
+                  <a:srgbClr val="B76E00"/>
+                </a:solidFill>
+                <a:latin typeface="Calibri"/>
+              </a:rPr>
+              <a:t>Answer: byVal: a copy is changed, so the original variable is unchanged after the call; byRef: the address is passed, so the original variable can be changed.</a:t>
+            </a:r>
+          </a:p>
+          <a:p>
+            <a:r>
+              <a:rPr sz="2200" b="1">
+                <a:solidFill>
+                  <a:srgbClr val="222222"/>
+                </a:solidFill>
+                <a:latin typeface="Calibri"/>
+              </a:rPr>
+              <a:t>3. A global total = 10; a procedure runs total = 5 then print(total); afterwards the main program runs print(total). What prints, and why?</a:t>
+            </a:r>
+          </a:p>
+          <a:p>
+            <a:pPr lvl="1"/>
+            <a:r>
+              <a:rPr sz="1800" i="1">
+                <a:solidFill>
+                  <a:srgbClr val="B76E00"/>
+                </a:solidFill>
+                <a:latin typeface="Calibri"/>
+              </a:rPr>
+              <a:t>Answer: 5 then 10 - the assignment created a local total that shadows the global inside the procedure; the global was never modified.</a:t>
             </a:r>
           </a:p>
         </p:txBody>
@@ -4230,7 +6866,7 @@
                 </a:solidFill>
                 <a:latin typeface="Calibri"/>
               </a:rPr>
-              <a:t>1. Which loop type tests its condition at the end and so always runs at least once?</a:t>
+              <a:t>1. 2.1.3: what is decomposition, and why does it help a team build a large program?</a:t>
             </a:r>
           </a:p>
           <a:p>
@@ -4242,7 +6878,7 @@
                 </a:solidFill>
                 <a:latin typeface="Calibri"/>
               </a:rPr>
-              <a:t>Answer: A post-conditioned loop (do...until); a while loop is pre-conditioned and may run zero times.</a:t>
+              <a:t>Answer: Breaking a problem into smaller sub-problems, each solved separately; sub-problems can be shared out, built and tested independently, then combined.</a:t>
             </a:r>
           </a:p>
           <a:p>
@@ -4253,7 +6889,7 @@
                 </a:solidFill>
                 <a:latin typeface="Calibri"/>
               </a:rPr>
-              <a:t>2. What is the single defining difference between a function and a procedure?</a:t>
+              <a:t>2. 2.1.3: what does it mean to identify the order of steps when thinking procedurally?</a:t>
             </a:r>
           </a:p>
           <a:p>
@@ -4265,7 +6901,7 @@
                 </a:solidFill>
                 <a:latin typeface="Calibri"/>
               </a:rPr>
-              <a:t>Answer: A function returns a single value (usable in an expression); a procedure returns no value.</a:t>
+              <a:t>Answer: Deciding which sub-tasks depend on the results of others, so they must run in a sequence that provides inputs before they are needed.</a:t>
             </a:r>
           </a:p>
           <a:p>
@@ -4276,7 +6912,7 @@
                 </a:solidFill>
                 <a:latin typeface="Calibri"/>
               </a:rPr>
-              <a:t>3. When an argument is passed by reference, what is actually passed and what is the consequence?</a:t>
+              <a:t>3. 2.1.4: what is a decision point, and which programming construct implements one?</a:t>
             </a:r>
           </a:p>
           <a:p>
@@ -4288,7 +6924,7 @@
                 </a:solidFill>
                 <a:latin typeface="Calibri"/>
               </a:rPr>
-              <a:t>Answer: The memory address of the original variable is passed, so changes inside the subroutine change the original.</a:t>
+              <a:t>Answer: A point where the route through the program depends on a condition; implemented by selection, e.g. an if or switch statement.</a:t>
             </a:r>
           </a:p>
           <a:p>
@@ -4299,7 +6935,7 @@
                 </a:solidFill>
                 <a:latin typeface="Calibri"/>
               </a:rPr>
-              <a:t>4. State the difference between the MAR and the MDR (interleaves 1.1.1 processor registers).</a:t>
+              <a:t>4. 1.2.4: state the difference between a class and an object.</a:t>
             </a:r>
           </a:p>
           <a:p>
@@ -4311,7 +6947,7 @@
                 </a:solidFill>
                 <a:latin typeface="Calibri"/>
               </a:rPr>
-              <a:t>Answer: The MAR holds the address of a memory location; the MDR holds the data or instruction at that location.</a:t>
+              <a:t>Answer: A class is a template defining attributes and methods; an object is a specific instance of that class created at run time.</a:t>
             </a:r>
           </a:p>
           <a:p>
@@ -4322,7 +6958,7 @@
                 </a:solidFill>
                 <a:latin typeface="Calibri"/>
               </a:rPr>
-              <a:t>5. What does a stack do on a push, and in what order are items removed (interleaves 1.4.2 data structures)?</a:t>
+              <a:t>5. 1.2.4: what is inheritance in object-oriented programming?</a:t>
             </a:r>
           </a:p>
           <a:p>
@@ -4334,7 +6970,7 @@
                 </a:solidFill>
                 <a:latin typeface="Calibri"/>
               </a:rPr>
-              <a:t>Answer: A push adds an item to the top; items are removed top-first in LIFO (last in, first out) order.</a:t>
+              <a:t>Answer: A subclass acquiring the attributes and methods of a superclass, modelling an is-a relationship, so common code is written once.</a:t>
             </a:r>
           </a:p>
         </p:txBody>
@@ -4438,7 +7074,7 @@
                 </a:solidFill>
                 <a:latin typeface="Calibri"/>
               </a:rPr>
-              <a:t> — A subroutine that calls itself, needing a base case to stop and a general/recursive case that moves closer to it.</a:t>
+              <a:t> — A subroutine that calls itself, with a base case to stop and a general case that moves toward it.</a:t>
             </a:r>
           </a:p>
           <a:p>
@@ -4458,7 +7094,7 @@
                 </a:solidFill>
                 <a:latin typeface="Calibri"/>
               </a:rPr>
-              <a:t> — The condition that stops recursion with no further recursive call; if unreached it causes a stack overflow.</a:t>
+              <a:t> — The condition under which a recursive subroutine returns without calling itself again.</a:t>
             </a:r>
           </a:p>
           <a:p>
@@ -4469,7 +7105,7 @@
                 </a:solidFill>
                 <a:latin typeface="Calibri"/>
               </a:rPr>
-              <a:t>Call stack</a:t>
+              <a:t>Stack frame</a:t>
             </a:r>
             <a:r>
               <a:rPr sz="1800">
@@ -4478,7 +7114,7 @@
                 </a:solidFill>
                 <a:latin typeface="Calibri"/>
               </a:rPr>
-              <a:t> — A stack of frames holding the parameters, local variables and return address for each active subroutine call.</a:t>
+              <a:t> — The record pushed onto the call stack per call: parameters, local variables and the return address.</a:t>
             </a:r>
           </a:p>
           <a:p>
@@ -4498,7 +7134,7 @@
                 </a:solidFill>
                 <a:latin typeface="Calibri"/>
               </a:rPr>
-              <a:t> — The region of a program in which a variable can be accessed (is visible).</a:t>
+              <a:t> — The region of a program in which a variable is visible and can be accessed.</a:t>
             </a:r>
           </a:p>
           <a:p>
@@ -4509,7 +7145,7 @@
                 </a:solidFill>
                 <a:latin typeface="Calibri"/>
               </a:rPr>
-              <a:t>Local variable</a:t>
+              <a:t>Global variable</a:t>
             </a:r>
             <a:r>
               <a:rPr sz="1800">
@@ -4518,7 +7154,7 @@
                 </a:solidFill>
                 <a:latin typeface="Calibri"/>
               </a:rPr>
-              <a:t> — A variable declared inside a subroutine, visible only within it and existing only while it runs.</a:t>
+              <a:t> — Declared outside all subroutines; visible everywhere and alive for the whole run.</a:t>
             </a:r>
           </a:p>
           <a:p>
@@ -4529,7 +7165,7 @@
                 </a:solidFill>
                 <a:latin typeface="Calibri"/>
               </a:rPr>
-              <a:t>Global variable</a:t>
+              <a:t>Modularity</a:t>
             </a:r>
             <a:r>
               <a:rPr sz="1800">
@@ -4538,7 +7174,7 @@
                 </a:solidFill>
                 <a:latin typeface="Calibri"/>
               </a:rPr>
-              <a:t> — A variable declared outside any subroutine, visible and usable anywhere in the program for its whole run.</a:t>
+              <a:t> — Splitting a program into self-contained subroutines that can be written, tested and reused separately.</a:t>
             </a:r>
           </a:p>
           <a:p>
@@ -4549,7 +7185,7 @@
                 </a:solidFill>
                 <a:latin typeface="Calibri"/>
               </a:rPr>
-              <a:t>By value vs by reference</a:t>
+              <a:t>Function</a:t>
             </a:r>
             <a:r>
               <a:rPr sz="1800">
@@ -4558,7 +7194,7 @@
                 </a:solidFill>
                 <a:latin typeface="Calibri"/>
               </a:rPr>
-              <a:t> — By value passes a copy so the original is unchanged; by reference passes the address so the original can be changed.</a:t>
+              <a:t> — A subroutine that returns a single value, so a call can sit inside an expression; a procedure returns none.</a:t>
             </a:r>
           </a:p>
           <a:p>
@@ -4569,7 +7205,7 @@
                 </a:solidFill>
                 <a:latin typeface="Calibri"/>
               </a:rPr>
-              <a:t>Encapsulation</a:t>
+              <a:t>By value / by reference</a:t>
             </a:r>
             <a:r>
               <a:rPr sz="1800">
@@ -4578,7 +7214,27 @@
                 </a:solidFill>
                 <a:latin typeface="Calibri"/>
               </a:rPr>
-              <a:t> — Bundling data and methods in a class with private attributes accessed only via public methods (data hiding).</a:t>
+              <a:t> — By value passes a copy, leaving the original unchanged; by reference passes the address, so the original can change.</a:t>
+            </a:r>
+          </a:p>
+          <a:p>
+            <a:r>
+              <a:rPr b="1" sz="2000">
+                <a:solidFill>
+                  <a:srgbClr val="1A365D"/>
+                </a:solidFill>
+                <a:latin typeface="Calibri"/>
+              </a:rPr>
+              <a:t>Polymorphism</a:t>
+            </a:r>
+            <a:r>
+              <a:rPr sz="1800">
+                <a:solidFill>
+                  <a:srgbClr val="222222"/>
+                </a:solidFill>
+                <a:latin typeface="Calibri"/>
+              </a:rPr>
+              <a:t> — The same method call behaving differently for objects of different classes, usually through overriding.</a:t>
             </a:r>
           </a:p>
         </p:txBody>
@@ -4638,7 +7294,7 @@
                 </a:solidFill>
                 <a:latin typeface="Calibri"/>
               </a:rPr>
-              <a:t>Constructs and iteration</a:t>
+              <a:t>Sequence and branching</a:t>
             </a:r>
           </a:p>
         </p:txBody>
@@ -4673,7 +7329,7 @@
                 </a:solidFill>
                 <a:latin typeface="Calibri"/>
               </a:rPr>
-              <a:t>Sequence (order matters), selection (if/elseif/else, switch/case) and iteration are the building blocks of any program</a:t>
+              <a:t>Sequence: statements execute one after another, and order matters.</a:t>
             </a:r>
           </a:p>
           <a:p>
@@ -4685,7 +7341,7 @@
                 </a:solidFill>
                 <a:latin typeface="Calibri"/>
               </a:rPr>
-              <a:t>Count-controlled iteration (for...next) repeats a fixed, known number of times; condition-controlled (while, do...until) repeats an unknown number of times</a:t>
+              <a:t>Branching (selection) chooses a path from a condition: if / elseif / else.</a:t>
             </a:r>
           </a:p>
           <a:p>
@@ -4697,7 +7353,103 @@
                 </a:solidFill>
                 <a:latin typeface="Calibri"/>
               </a:rPr>
-              <a:t>while is pre-conditioned (tests at the start, may run zero times); do...until is post-conditioned (tests at the end, runs at least once, good for input validation)</a:t>
+              <a:t>switch/case selects cleanly between many discrete values of one variable.</a:t>
+            </a:r>
+          </a:p>
+          <a:p>
+            <a:pPr/>
+            <a:r>
+              <a:rPr sz="2000" b="0">
+                <a:solidFill>
+                  <a:srgbClr val="222222"/>
+                </a:solidFill>
+                <a:latin typeface="Calibri"/>
+              </a:rPr>
+              <a:t>Every program, however complex, is built from sequence, branching and iteration.</a:t>
+            </a:r>
+          </a:p>
+          <a:p>
+            <a:pPr lvl="1"/>
+            <a:r>
+              <a:rPr sz="1600" b="0">
+                <a:solidFill>
+                  <a:srgbClr val="1A365D"/>
+                </a:solidFill>
+                <a:latin typeface="Consolas"/>
+              </a:rPr>
+              <a:t>if mark &gt;= 70 then</a:t>
+            </a:r>
+          </a:p>
+          <a:p>
+            <a:pPr lvl="1"/>
+            <a:r>
+              <a:rPr sz="1600" b="0">
+                <a:solidFill>
+                  <a:srgbClr val="1A365D"/>
+                </a:solidFill>
+                <a:latin typeface="Consolas"/>
+              </a:rPr>
+              <a:t>   grade = "A"</a:t>
+            </a:r>
+          </a:p>
+          <a:p>
+            <a:pPr lvl="1"/>
+            <a:r>
+              <a:rPr sz="1600" b="0">
+                <a:solidFill>
+                  <a:srgbClr val="1A365D"/>
+                </a:solidFill>
+                <a:latin typeface="Consolas"/>
+              </a:rPr>
+              <a:t>elseif mark &gt;= 60 then</a:t>
+            </a:r>
+          </a:p>
+          <a:p>
+            <a:pPr lvl="1"/>
+            <a:r>
+              <a:rPr sz="1600" b="0">
+                <a:solidFill>
+                  <a:srgbClr val="1A365D"/>
+                </a:solidFill>
+                <a:latin typeface="Consolas"/>
+              </a:rPr>
+              <a:t>   grade = "B"</a:t>
+            </a:r>
+          </a:p>
+          <a:p>
+            <a:pPr lvl="1"/>
+            <a:r>
+              <a:rPr sz="1600" b="0">
+                <a:solidFill>
+                  <a:srgbClr val="1A365D"/>
+                </a:solidFill>
+                <a:latin typeface="Consolas"/>
+              </a:rPr>
+              <a:t>else</a:t>
+            </a:r>
+          </a:p>
+          <a:p>
+            <a:pPr lvl="1"/>
+            <a:r>
+              <a:rPr sz="1600" b="0">
+                <a:solidFill>
+                  <a:srgbClr val="1A365D"/>
+                </a:solidFill>
+                <a:latin typeface="Consolas"/>
+              </a:rPr>
+              <a:t>   grade = "C"</a:t>
+            </a:r>
+          </a:p>
+          <a:p>
+            <a:pPr lvl="1"/>
+            <a:r>
+              <a:rPr sz="1600" b="0">
+                <a:solidFill>
+                  <a:srgbClr val="1A365D"/>
+                </a:solidFill>
+                <a:latin typeface="Consolas"/>
+              </a:rPr>
+              <a:t>endif</a:t>
             </a:r>
           </a:p>
         </p:txBody>
@@ -4757,7 +7509,7 @@
                 </a:solidFill>
                 <a:latin typeface="Calibri"/>
               </a:rPr>
-              <a:t>Recursion and the call stack</a:t>
+              <a:t>Count-controlled iteration</a:t>
             </a:r>
           </a:p>
         </p:txBody>
@@ -4792,7 +7544,7 @@
                 </a:solidFill>
                 <a:latin typeface="Calibri"/>
               </a:rPr>
-              <a:t>A recursive subroutine calls itself and must have a base case (stops recursion) plus a general case (calls itself, moving toward the base case)</a:t>
+              <a:t>Repeats a fixed number of times, known before the loop starts.</a:t>
             </a:r>
           </a:p>
           <a:p>
@@ -4804,7 +7556,7 @@
                 </a:solidFill>
                 <a:latin typeface="Calibri"/>
               </a:rPr>
-              <a:t>Each call pushes a stack frame storing parameters, local variables and the return address; frames are popped in reverse (LIFO) as calls return</a:t>
+              <a:t>for ... next manages the counter automatically.</a:t>
             </a:r>
           </a:p>
           <a:p>
@@ -4816,7 +7568,67 @@
                 </a:solidFill>
                 <a:latin typeface="Calibri"/>
               </a:rPr>
-              <a:t>A missing or unreached base case causes endless calls and a stack overflow; recursion uses more memory than iteration but suits self-similar problems like tree traversal and factorial</a:t>
+              <a:t>The counter is usable inside the loop, e.g. as an array index.</a:t>
+            </a:r>
+          </a:p>
+          <a:p>
+            <a:pPr/>
+            <a:r>
+              <a:rPr sz="2000" b="0">
+                <a:solidFill>
+                  <a:srgbClr val="222222"/>
+                </a:solidFill>
+                <a:latin typeface="Calibri"/>
+              </a:rPr>
+              <a:t>Use it whenever the number of repetitions is known: process every array element, repeat n times.</a:t>
+            </a:r>
+          </a:p>
+          <a:p>
+            <a:pPr lvl="1"/>
+            <a:r>
+              <a:rPr sz="1600" b="0">
+                <a:solidFill>
+                  <a:srgbClr val="1A365D"/>
+                </a:solidFill>
+                <a:latin typeface="Consolas"/>
+              </a:rPr>
+              <a:t>total = 0</a:t>
+            </a:r>
+          </a:p>
+          <a:p>
+            <a:pPr lvl="1"/>
+            <a:r>
+              <a:rPr sz="1600" b="0">
+                <a:solidFill>
+                  <a:srgbClr val="1A365D"/>
+                </a:solidFill>
+                <a:latin typeface="Consolas"/>
+              </a:rPr>
+              <a:t>for i = 0 to 4</a:t>
+            </a:r>
+          </a:p>
+          <a:p>
+            <a:pPr lvl="1"/>
+            <a:r>
+              <a:rPr sz="1600" b="0">
+                <a:solidFill>
+                  <a:srgbClr val="1A365D"/>
+                </a:solidFill>
+                <a:latin typeface="Consolas"/>
+              </a:rPr>
+              <a:t>   total = total + scores[i]</a:t>
+            </a:r>
+          </a:p>
+          <a:p>
+            <a:pPr lvl="1"/>
+            <a:r>
+              <a:rPr sz="1600" b="0">
+                <a:solidFill>
+                  <a:srgbClr val="1A365D"/>
+                </a:solidFill>
+                <a:latin typeface="Consolas"/>
+              </a:rPr>
+              <a:t>next i</a:t>
             </a:r>
           </a:p>
         </p:txBody>
@@ -4876,7 +7688,7 @@
                 </a:solidFill>
                 <a:latin typeface="Calibri"/>
               </a:rPr>
-              <a:t>Scope: local vs global</a:t>
+              <a:t>Condition-controlled iteration</a:t>
             </a:r>
           </a:p>
         </p:txBody>
@@ -4911,7 +7723,7 @@
                 </a:solidFill>
                 <a:latin typeface="Calibri"/>
               </a:rPr>
-              <a:t>A local variable is declared inside a subroutine and is visible only there; a global is declared in the main program and is visible everywhere</a:t>
+              <a:t>Repeats an unknown number of times, until a condition changes.</a:t>
             </a:r>
           </a:p>
           <a:p>
@@ -4923,7 +7735,7 @@
                 </a:solidFill>
                 <a:latin typeface="Calibri"/>
               </a:rPr>
-              <a:t>Prefer local variables: fewer side effects, memory freed on exit, and code that is more modular, reusable and easier to debug</a:t>
+              <a:t>while tests at the START (pre-conditioned): the body may run zero times.</a:t>
             </a:r>
           </a:p>
           <a:p>
@@ -4935,7 +7747,67 @@
                 </a:solidFill>
                 <a:latin typeface="Calibri"/>
               </a:rPr>
-              <a:t>A local variable shadows a same-named global within its subroutine, so an assignment to it does not change the global</a:t>
+              <a:t>do ... until tests at the END (post-conditioned): the body always runs at least once.</a:t>
+            </a:r>
+          </a:p>
+          <a:p>
+            <a:pPr/>
+            <a:r>
+              <a:rPr sz="2000" b="0">
+                <a:solidFill>
+                  <a:srgbClr val="222222"/>
+                </a:solidFill>
+                <a:latin typeface="Calibri"/>
+              </a:rPr>
+              <a:t>Post-conditioned loops suit input validation - the user must be asked at least once.</a:t>
+            </a:r>
+          </a:p>
+          <a:p>
+            <a:pPr lvl="1"/>
+            <a:r>
+              <a:rPr sz="1600" b="0">
+                <a:solidFill>
+                  <a:srgbClr val="1A365D"/>
+                </a:solidFill>
+                <a:latin typeface="Consolas"/>
+              </a:rPr>
+              <a:t>do</a:t>
+            </a:r>
+          </a:p>
+          <a:p>
+            <a:pPr lvl="1"/>
+            <a:r>
+              <a:rPr sz="1600" b="0">
+                <a:solidFill>
+                  <a:srgbClr val="1A365D"/>
+                </a:solidFill>
+                <a:latin typeface="Consolas"/>
+              </a:rPr>
+              <a:t>   mark = int(input("Enter a mark 0-100: "))</a:t>
+            </a:r>
+          </a:p>
+          <a:p>
+            <a:pPr lvl="1"/>
+            <a:r>
+              <a:rPr sz="1600" b="0">
+                <a:solidFill>
+                  <a:srgbClr val="1A365D"/>
+                </a:solidFill>
+                <a:latin typeface="Consolas"/>
+              </a:rPr>
+              <a:t>until mark &gt;= 0 AND mark &lt;= 100</a:t>
+            </a:r>
+          </a:p>
+          <a:p>
+            <a:pPr/>
+            <a:r>
+              <a:rPr sz="1800" b="1">
+                <a:solidFill>
+                  <a:srgbClr val="B76E00"/>
+                </a:solidFill>
+                <a:latin typeface="Calibri"/>
+              </a:rPr>
+              <a:t>The while/do-until zero-times distinction is a favourite 2-mark exam discriminator.</a:t>
             </a:r>
           </a:p>
         </p:txBody>
@@ -4995,7 +7867,7 @@
                 </a:solidFill>
                 <a:latin typeface="Calibri"/>
               </a:rPr>
-              <a:t>Modularity, functions and parameters</a:t>
+              <a:t>Recursion</a:t>
             </a:r>
           </a:p>
         </p:txBody>
@@ -5030,7 +7902,7 @@
                 </a:solidFill>
                 <a:latin typeface="Calibri"/>
               </a:rPr>
-              <a:t>Modularity splits a program into self-contained subroutines (modules), making it easier to write, test, debug, reuse and share between a team</a:t>
+              <a:t>A recursive subroutine calls itself.</a:t>
             </a:r>
           </a:p>
           <a:p>
@@ -5042,7 +7914,7 @@
                 </a:solidFill>
                 <a:latin typeface="Calibri"/>
               </a:rPr>
-              <a:t>A procedure performs a task and returns no value; a function performs a task and returns a single value usable in an expression</a:t>
+              <a:t>It needs a base case: a condition that returns without another call.</a:t>
             </a:r>
           </a:p>
           <a:p>
@@ -5054,7 +7926,103 @@
                 </a:solidFill>
                 <a:latin typeface="Calibri"/>
               </a:rPr>
-              <a:t>A parameter is the variable in the definition; an argument is the value supplied at the call; pass by reference is efficient for large data and can return changes, by value is safer</a:t>
+              <a:t>It needs a general case: a call to itself on a smaller problem, moving toward the base case.</a:t>
+            </a:r>
+          </a:p>
+          <a:p>
+            <a:pPr/>
+            <a:r>
+              <a:rPr sz="2000" b="0">
+                <a:solidFill>
+                  <a:srgbClr val="222222"/>
+                </a:solidFill>
+                <a:latin typeface="Calibri"/>
+              </a:rPr>
+              <a:t>A missing or unreachable base case gives endless calls and a stack overflow.</a:t>
+            </a:r>
+          </a:p>
+          <a:p>
+            <a:pPr lvl="1"/>
+            <a:r>
+              <a:rPr sz="1600" b="0">
+                <a:solidFill>
+                  <a:srgbClr val="1A365D"/>
+                </a:solidFill>
+                <a:latin typeface="Consolas"/>
+              </a:rPr>
+              <a:t>function factorial(n)</a:t>
+            </a:r>
+          </a:p>
+          <a:p>
+            <a:pPr lvl="1"/>
+            <a:r>
+              <a:rPr sz="1600" b="0">
+                <a:solidFill>
+                  <a:srgbClr val="1A365D"/>
+                </a:solidFill>
+                <a:latin typeface="Consolas"/>
+              </a:rPr>
+              <a:t>   if n &lt;= 1 then</a:t>
+            </a:r>
+          </a:p>
+          <a:p>
+            <a:pPr lvl="1"/>
+            <a:r>
+              <a:rPr sz="1600" b="0">
+                <a:solidFill>
+                  <a:srgbClr val="1A365D"/>
+                </a:solidFill>
+                <a:latin typeface="Consolas"/>
+              </a:rPr>
+              <a:t>      return 1</a:t>
+            </a:r>
+          </a:p>
+          <a:p>
+            <a:pPr lvl="1"/>
+            <a:r>
+              <a:rPr sz="1600" b="0">
+                <a:solidFill>
+                  <a:srgbClr val="1A365D"/>
+                </a:solidFill>
+                <a:latin typeface="Consolas"/>
+              </a:rPr>
+              <a:t>   else</a:t>
+            </a:r>
+          </a:p>
+          <a:p>
+            <a:pPr lvl="1"/>
+            <a:r>
+              <a:rPr sz="1600" b="0">
+                <a:solidFill>
+                  <a:srgbClr val="1A365D"/>
+                </a:solidFill>
+                <a:latin typeface="Consolas"/>
+              </a:rPr>
+              <a:t>      return n * factorial(n - 1)</a:t>
+            </a:r>
+          </a:p>
+          <a:p>
+            <a:pPr lvl="1"/>
+            <a:r>
+              <a:rPr sz="1600" b="0">
+                <a:solidFill>
+                  <a:srgbClr val="1A365D"/>
+                </a:solidFill>
+                <a:latin typeface="Consolas"/>
+              </a:rPr>
+              <a:t>   endif</a:t>
+            </a:r>
+          </a:p>
+          <a:p>
+            <a:pPr lvl="1"/>
+            <a:r>
+              <a:rPr sz="1600" b="0">
+                <a:solidFill>
+                  <a:srgbClr val="1A365D"/>
+                </a:solidFill>
+                <a:latin typeface="Consolas"/>
+              </a:rPr>
+              <a:t>endfunction</a:t>
             </a:r>
           </a:p>
         </p:txBody>
